--- a/docs/content/nested_anova/nested_anova_lecture.pptx
+++ b/docs/content/nested_anova/nested_anova_lecture.pptx
@@ -45,6 +45,12 @@
     <p:sldId id="293" r:id="rId39"/>
     <p:sldId id="294" r:id="rId40"/>
     <p:sldId id="295" r:id="rId41"/>
+    <p:sldId id="296" r:id="rId42"/>
+    <p:sldId id="297" r:id="rId43"/>
+    <p:sldId id="298" r:id="rId44"/>
+    <p:sldId id="299" r:id="rId45"/>
+    <p:sldId id="300" r:id="rId46"/>
+    <p:sldId id="301" r:id="rId47"/>
   </p:sldIdLst>
   <p:sldSz cx="9144000" cy="5143500" type="screen16x9"/>
   <p:notesSz cx="6858000" cy="9144000"/>
@@ -4155,7 +4161,7 @@
             <a:pPr lvl="0"/>
             <a:r>
               <a:rPr/>
-              <a:t>4 levels of urchin grazing: none, low, medium, high</a:t>
+              <a:t>4 urchin densities: 0%, 33%, 66%, 100% of natural density</a:t>
             </a:r>
           </a:p>
           <a:p>
@@ -8192,7 +8198,39 @@
             <a:pPr lvl="0"/>
             <a:r>
               <a:rPr/>
-              <a:t>Four urchin density treatments (none = removed, low = control, medium = 33% of original density, high = 66% of original density)</a:t>
+              <a:t>Four urchin density treatments — </a:t>
+            </a:r>
+            <a:r>
+              <a:rPr b="1"/>
+              <a:t>0%</a:t>
+            </a:r>
+            <a:r>
+              <a:rPr/>
+              <a:t> (urchins removed), </a:t>
+            </a:r>
+            <a:r>
+              <a:rPr b="1"/>
+              <a:t>33%</a:t>
+            </a:r>
+            <a:r>
+              <a:rPr/>
+              <a:t>, </a:t>
+            </a:r>
+            <a:r>
+              <a:rPr b="1"/>
+              <a:t>66%</a:t>
+            </a:r>
+            <a:r>
+              <a:rPr/>
+              <a:t>, and </a:t>
+            </a:r>
+            <a:r>
+              <a:rPr b="1"/>
+              <a:t>100%</a:t>
+            </a:r>
+            <a:r>
+              <a:rPr/>
+              <a:t> of natural density (the unmanipulated control)</a:t>
             </a:r>
           </a:p>
           <a:p>
@@ -8385,16 +8423,16 @@
 ## # A tibble: 6 × 4
 ##   treat patch  quad algae
 ##   &lt;fct&gt; &lt;fct&gt; &lt;dbl&gt; &lt;dbl&gt;
-## 1 high  1         1     0
-## 2 high  1         2     0
-## 3 high  1         3     0
-## 4 high  1         4     6
-## 5 high  1         5     2
-## 6 high  2         1     0
+## 1 100%  1         1     0
+## 2 100%  1         2     0
+## 3 100%  1         3     0
+## 4 100%  1         4     6
+## 5 100%  1         5     2
+## 6 100%  2         1     0
 ## 
 ## 
 ## Treatment levels:
-## [1] "none"   "low"    "medium" "high"</a:t>
+## [1] "0%"   "33%"  "66%"  "100%"</a:t>
             </a:r>
           </a:p>
         </p:txBody>
@@ -8423,12 +8461,12 @@
               </a:rPr>
               <a:t>## Summary statistics by treatment:
 ## # A tibble: 4 × 7
-##   treat      n  mean    sd    se   min   max
-##   &lt;fct&gt;  &lt;int&gt; &lt;dbl&gt; &lt;dbl&gt; &lt;dbl&gt; &lt;dbl&gt; &lt;dbl&gt;
-## 1 none      20  39.2 28.7  6.41      0    83
-## 2 low       20  21.6 25.1  5.62      0    79
-## 3 medium    20  19   25.7  5.74      0    71
-## 4 high      20   1.3  3.18 0.711     0    13</a:t>
+##   treat     n  mean    sd    se   min   max
+##   &lt;fct&gt; &lt;int&gt; &lt;dbl&gt; &lt;dbl&gt; &lt;dbl&gt; &lt;dbl&gt; &lt;dbl&gt;
+## 1 0%       20  39.2 28.7  6.41      0    83
+## 2 33%      20  19   25.7  5.74      0    71
+## 3 66%      20  21.6 25.1  5.62      0    79
+## 4 100%     20   1.3  3.18 0.711     0    13</a:t>
             </a:r>
           </a:p>
         </p:txBody>
@@ -8487,7 +8525,7 @@
       </p:sp>
       <p:pic>
         <p:nvPicPr>
-          <p:cNvPr descr="nested_anova_lecture_files/figure-pptx/unnamed-chunk-4-1.png" id="0" name="Picture 1"/>
+          <p:cNvPr descr="nested_anova_lecture_files/figure-pptx/nested-anova-04-1.png" id="0" name="Picture 1"/>
           <p:cNvPicPr>
             <a:picLocks noGrp="1" noChangeAspect="1"/>
           </p:cNvPicPr>
@@ -9348,6 +9386,56 @@
             <a:r>
               <a:rPr>
                 <a:solidFill>
+                  <a:srgbClr val="5E5E5E"/>
+                </a:solidFill>
+                <a:latin typeface="Courier"/>
+              </a:rPr>
+              <a:t># Error(patch) -- not Error(treat:patch). Patch IDs are already unique</a:t>
+            </a:r>
+            <a:br/>
+            <a:r>
+              <a:rPr>
+                <a:solidFill>
+                  <a:srgbClr val="5E5E5E"/>
+                </a:solidFill>
+                <a:latin typeface="Courier"/>
+              </a:rPr>
+              <a:t># (1-16) and each patch sits in exactly one treatment, so naming the patch</a:t>
+            </a:r>
+            <a:br/>
+            <a:r>
+              <a:rPr>
+                <a:solidFill>
+                  <a:srgbClr val="5E5E5E"/>
+                </a:solidFill>
+                <a:latin typeface="Courier"/>
+              </a:rPr>
+              <a:t># alone is enough. Writing treat:patch asks for 4 x 16 = 64 combinations</a:t>
+            </a:r>
+            <a:br/>
+            <a:r>
+              <a:rPr>
+                <a:solidFill>
+                  <a:srgbClr val="5E5E5E"/>
+                </a:solidFill>
+                <a:latin typeface="Courier"/>
+              </a:rPr>
+              <a:t># when only 16 exist, which makes R warn "Error() model is singular".</a:t>
+            </a:r>
+            <a:br/>
+            <a:r>
+              <a:rPr>
+                <a:solidFill>
+                  <a:srgbClr val="5E5E5E"/>
+                </a:solidFill>
+                <a:latin typeface="Courier"/>
+              </a:rPr>
+              <a:t># Both give identical numbers; this one does it without the warning.</a:t>
+            </a:r>
+            <a:br/>
+            <a:r>
+              <a:rPr>
+                <a:solidFill>
                   <a:srgbClr val="003B4F"/>
                 </a:solidFill>
                 <a:latin typeface="Courier"/>
@@ -9424,29 +9512,1434 @@
                 </a:solidFill>
                 <a:latin typeface="Courier"/>
               </a:rPr>
-              <a:t>(treat</a:t>
+              <a:t>(patch), </a:t>
             </a:r>
             <a:r>
               <a:rPr>
                 <a:solidFill>
+                  <a:srgbClr val="657422"/>
+                </a:solidFill>
+                <a:latin typeface="Courier"/>
+              </a:rPr>
+              <a:t>data =</a:t>
+            </a:r>
+            <a:r>
+              <a:rPr>
+                <a:solidFill>
+                  <a:srgbClr val="003B4F"/>
+                </a:solidFill>
+                <a:latin typeface="Courier"/>
+              </a:rPr>
+              <a:t> u_df)</a:t>
+            </a:r>
+            <a:br/>
+            <a:r>
+              <a:rPr>
+                <a:solidFill>
+                  <a:srgbClr val="4758AB"/>
+                </a:solidFill>
+                <a:latin typeface="Courier"/>
+              </a:rPr>
+              <a:t>cat</a:t>
+            </a:r>
+            <a:r>
+              <a:rPr>
+                <a:solidFill>
+                  <a:srgbClr val="003B4F"/>
+                </a:solidFill>
+                <a:latin typeface="Courier"/>
+              </a:rPr>
+              <a:t>(</a:t>
+            </a:r>
+            <a:r>
+              <a:rPr>
+                <a:solidFill>
+                  <a:srgbClr val="20794D"/>
+                </a:solidFill>
+                <a:latin typeface="Courier"/>
+              </a:rPr>
+              <a:t>"Correctly specified nested ANOVA:</a:t>
+            </a:r>
+            <a:r>
+              <a:rPr>
+                <a:solidFill>
                   <a:srgbClr val="5E5E5E"/>
                 </a:solidFill>
                 <a:latin typeface="Courier"/>
               </a:rPr>
-              <a:t>:</a:t>
+              <a:t>\n\n</a:t>
             </a:r>
             <a:r>
               <a:rPr>
                 <a:solidFill>
+                  <a:srgbClr val="20794D"/>
+                </a:solidFill>
+                <a:latin typeface="Courier"/>
+              </a:rPr>
+              <a:t>"</a:t>
+            </a:r>
+            <a:r>
+              <a:rPr>
+                <a:solidFill>
                   <a:srgbClr val="003B4F"/>
                 </a:solidFill>
                 <a:latin typeface="Courier"/>
               </a:rPr>
-              <a:t>patch), </a:t>
-            </a:r>
+              <a:t>)</a:t>
+            </a:r>
+            <a:br/>
+            <a:r>
+              <a:rPr i="1">
+                <a:solidFill>
+                  <a:srgbClr val="5E5E5E"/>
+                </a:solidFill>
+                <a:latin typeface="Courier"/>
+              </a:rPr>
+              <a:t>## Correctly specified nested ANOVA:</a:t>
+            </a:r>
+            <a:br/>
             <a:r>
               <a:rPr>
                 <a:solidFill>
+                  <a:srgbClr val="4758AB"/>
+                </a:solidFill>
+                <a:latin typeface="Courier"/>
+              </a:rPr>
+              <a:t>summary</a:t>
+            </a:r>
+            <a:r>
+              <a:rPr>
+                <a:solidFill>
+                  <a:srgbClr val="003B4F"/>
+                </a:solidFill>
+                <a:latin typeface="Courier"/>
+              </a:rPr>
+              <a:t>(u_nested_model)</a:t>
+            </a:r>
+            <a:br/>
+            <a:r>
+              <a:rPr i="1">
+                <a:solidFill>
+                  <a:srgbClr val="5E5E5E"/>
+                </a:solidFill>
+                <a:latin typeface="Courier"/>
+              </a:rPr>
+              <a:t>## </a:t>
+            </a:r>
+            <a:br/>
+            <a:r>
+              <a:rPr i="1">
+                <a:solidFill>
+                  <a:srgbClr val="5E5E5E"/>
+                </a:solidFill>
+                <a:latin typeface="Courier"/>
+              </a:rPr>
+              <a:t>## Error: patch</a:t>
+            </a:r>
+            <a:br/>
+            <a:r>
+              <a:rPr i="1">
+                <a:solidFill>
+                  <a:srgbClr val="5E5E5E"/>
+                </a:solidFill>
+                <a:latin typeface="Courier"/>
+              </a:rPr>
+              <a:t>##           Df Sum Sq Mean Sq F value Pr(&gt;F)  </a:t>
+            </a:r>
+            <a:br/>
+            <a:r>
+              <a:rPr i="1">
+                <a:solidFill>
+                  <a:srgbClr val="5E5E5E"/>
+                </a:solidFill>
+                <a:latin typeface="Courier"/>
+              </a:rPr>
+              <a:t>## treat      3  14429    4810   2.717 0.0913 .</a:t>
+            </a:r>
+            <a:br/>
+            <a:r>
+              <a:rPr i="1">
+                <a:solidFill>
+                  <a:srgbClr val="5E5E5E"/>
+                </a:solidFill>
+                <a:latin typeface="Courier"/>
+              </a:rPr>
+              <a:t>## Residuals 12  21242    1770                 </a:t>
+            </a:r>
+            <a:br/>
+            <a:r>
+              <a:rPr i="1">
+                <a:solidFill>
+                  <a:srgbClr val="5E5E5E"/>
+                </a:solidFill>
+                <a:latin typeface="Courier"/>
+              </a:rPr>
+              <a:t>## ---</a:t>
+            </a:r>
+            <a:br/>
+            <a:r>
+              <a:rPr i="1">
+                <a:solidFill>
+                  <a:srgbClr val="5E5E5E"/>
+                </a:solidFill>
+                <a:latin typeface="Courier"/>
+              </a:rPr>
+              <a:t>## Signif. codes:  0 '***' 0.001 '**' 0.01 '*' 0.05 '.' 0.1 ' ' 1</a:t>
+            </a:r>
+            <a:br/>
+            <a:r>
+              <a:rPr i="1">
+                <a:solidFill>
+                  <a:srgbClr val="5E5E5E"/>
+                </a:solidFill>
+                <a:latin typeface="Courier"/>
+              </a:rPr>
+              <a:t>## </a:t>
+            </a:r>
+            <a:br/>
+            <a:r>
+              <a:rPr i="1">
+                <a:solidFill>
+                  <a:srgbClr val="5E5E5E"/>
+                </a:solidFill>
+                <a:latin typeface="Courier"/>
+              </a:rPr>
+              <a:t>## Error: Within</a:t>
+            </a:r>
+            <a:br/>
+            <a:r>
+              <a:rPr i="1">
+                <a:solidFill>
+                  <a:srgbClr val="5E5E5E"/>
+                </a:solidFill>
+                <a:latin typeface="Courier"/>
+              </a:rPr>
+              <a:t>##           Df Sum Sq Mean Sq F value Pr(&gt;F)</a:t>
+            </a:r>
+            <a:br/>
+            <a:r>
+              <a:rPr i="1">
+                <a:solidFill>
+                  <a:srgbClr val="5E5E5E"/>
+                </a:solidFill>
+                <a:latin typeface="Courier"/>
+              </a:rPr>
+              <a:t>## Residuals 64  19110   298.6</a:t>
+            </a:r>
+          </a:p>
+        </p:txBody>
+      </p:sp>
+    </p:spTree>
+  </p:cSld>
+</p:sld>
+</file>
+
+<file path=ppt/slides/slide41.xml><?xml version="1.0" encoding="utf-8"?>
+<p:sld xmlns:a="http://schemas.openxmlformats.org/drawingml/2006/main" xmlns:r="http://schemas.openxmlformats.org/officeDocument/2006/relationships" xmlns:p="http://schemas.openxmlformats.org/presentationml/2006/main">
+  <p:cSld>
+    <p:spTree>
+      <p:nvGrpSpPr>
+        <p:cNvPr id="1" name=""/>
+        <p:cNvGrpSpPr/>
+        <p:nvPr/>
+      </p:nvGrpSpPr>
+      <p:grpSpPr>
+        <a:xfrm>
+          <a:off x="0" y="0"/>
+          <a:ext cx="0" cy="0"/>
+          <a:chOff x="0" y="0"/>
+          <a:chExt cx="0" cy="0"/>
+        </a:xfrm>
+      </p:grpSpPr>
+      <p:sp>
+        <p:nvSpPr>
+          <p:cNvPr id="2" name="Title 1"/>
+          <p:cNvSpPr>
+            <a:spLocks noGrp="1"/>
+          </p:cNvSpPr>
+          <p:nvPr>
+            <p:ph type="title"/>
+          </p:nvPr>
+        </p:nvSpPr>
+        <p:spPr>
+          <a:xfrm>
+            <a:off x="139485" y="78119"/>
+            <a:ext cx="8229600" cy="607682"/>
+          </a:xfrm>
+        </p:spPr>
+        <p:txBody>
+          <a:bodyPr/>
+          <a:lstStyle/>
+          <a:p>
+            <a:pPr lvl="0" indent="0" marL="0">
+              <a:buNone/>
+            </a:pPr>
+            <a:r>
+              <a:rPr/>
+              <a:t>Same Numerator, Different Denominator</a:t>
+            </a:r>
+          </a:p>
+        </p:txBody>
+      </p:sp>
+      <p:sp>
+        <p:nvSpPr>
+          <p:cNvPr id="3" name="Text Placeholder 2"/>
+          <p:cNvSpPr>
+            <a:spLocks noGrp="1"/>
+          </p:cNvSpPr>
+          <p:nvPr>
+            <p:ph idx="1" type="body"/>
+          </p:nvPr>
+        </p:nvSpPr>
+        <p:spPr/>
+        <p:txBody>
+          <a:bodyPr/>
+          <a:lstStyle/>
+          <a:p>
+            <a:pPr lvl="0" indent="0" marL="0">
+              <a:buNone/>
+            </a:pPr>
+            <a:r>
+              <a:rPr/>
+              <a:t>Both models used the </a:t>
+            </a:r>
+            <a:r>
+              <a:rPr b="1"/>
+              <a:t>same 80 quadrats</a:t>
+            </a:r>
+            <a:r>
+              <a:rPr/>
+              <a:t> and produced the </a:t>
+            </a:r>
+            <a:r>
+              <a:rPr b="1"/>
+              <a:t>same sums of squares</a:t>
+            </a:r>
+            <a:r>
+              <a:rPr/>
+              <a:t>. Only the F-test’s denominator changed:</a:t>
+            </a:r>
+          </a:p>
+        </p:txBody>
+      </p:sp>
+      <p:graphicFrame>
+        <p:nvGraphicFramePr>
+          <p:cNvPr id="6" name="Content Placeholder 5"/>
+          <p:cNvGraphicFramePr>
+            <a:graphicFrameLocks noGrp="1"/>
+          </p:cNvGraphicFramePr>
+          <p:nvPr>
+            <p:ph idx="1"/>
+          </p:nvPr>
+        </p:nvGraphicFramePr>
+        <p:xfrm>
+          <a:off x="127000" y="1270000"/>
+          <a:ext cx="4432300" cy="3302000"/>
+        </p:xfrm>
+        <a:graphic>
+          <a:graphicData uri="http://schemas.openxmlformats.org/drawingml/2006/table">
+            <a:tbl>
+              <a:tblPr firstRow="1" bandRow="1">
+                <a:tableStyleId>{5C22544A-7EE6-4342-B048-85BDC9FD1C3A}</a:tableStyleId>
+              </a:tblPr>
+              <a:tblGrid>
+                <a:gridCol w="889000"/>
+                <a:gridCol w="889000"/>
+                <a:gridCol w="889000"/>
+                <a:gridCol w="889000"/>
+                <a:gridCol w="889000"/>
+              </a:tblGrid>
+              <a:tr h="0">
+                <a:tc>
+                  <a:txBody>
+                    <a:bodyPr/>
+                    <a:lstStyle/>
+                    <a:p>
+                      <a:endParaRPr/>
+                    </a:p>
+                  </a:txBody>
+                  <a:tcPr/>
+                </a:tc>
+                <a:tc>
+                  <a:txBody>
+                    <a:bodyPr/>
+                    <a:lstStyle/>
+                    <a:p>
+                      <a:pPr lvl="0" indent="0" marL="0">
+                        <a:buNone/>
+                      </a:pPr>
+                      <a:r>
+                        <a:rPr/>
+                        <a:t>MS treat</a:t>
+                      </a:r>
+                    </a:p>
+                  </a:txBody>
+                  <a:tcPr/>
+                </a:tc>
+                <a:tc>
+                  <a:txBody>
+                    <a:bodyPr/>
+                    <a:lstStyle/>
+                    <a:p>
+                      <a:pPr lvl="0" indent="0" marL="0">
+                        <a:buNone/>
+                      </a:pPr>
+                      <a:r>
+                        <a:rPr/>
+                        <a:t>÷ MS error</a:t>
+                      </a:r>
+                    </a:p>
+                  </a:txBody>
+                  <a:tcPr/>
+                </a:tc>
+                <a:tc>
+                  <a:txBody>
+                    <a:bodyPr/>
+                    <a:lstStyle/>
+                    <a:p>
+                      <a:pPr lvl="0" indent="0" marL="0">
+                        <a:buNone/>
+                      </a:pPr>
+                      <a:r>
+                        <a:rPr/>
+                        <a:t>= F</a:t>
+                      </a:r>
+                    </a:p>
+                  </a:txBody>
+                  <a:tcPr/>
+                </a:tc>
+                <a:tc>
+                  <a:txBody>
+                    <a:bodyPr/>
+                    <a:lstStyle/>
+                    <a:p>
+                      <a:pPr lvl="0" indent="0" marL="0">
+                        <a:buNone/>
+                      </a:pPr>
+                      <a:r>
+                        <a:rPr/>
+                        <a:t>p</a:t>
+                      </a:r>
+                    </a:p>
+                  </a:txBody>
+                  <a:tcPr/>
+                </a:tc>
+              </a:tr>
+              <a:tr h="0">
+                <a:tc>
+                  <a:txBody>
+                    <a:bodyPr/>
+                    <a:lstStyle/>
+                    <a:p>
+                      <a:pPr lvl="0" indent="0" marL="0">
+                        <a:buNone/>
+                      </a:pPr>
+                      <a:r>
+                        <a:rPr b="1"/>
+                        <a:t>Naive factorial</a:t>
+                      </a:r>
+                    </a:p>
+                  </a:txBody>
+                </a:tc>
+                <a:tc>
+                  <a:txBody>
+                    <a:bodyPr/>
+                    <a:lstStyle/>
+                    <a:p>
+                      <a:pPr lvl="0" indent="0" marL="0">
+                        <a:buNone/>
+                      </a:pPr>
+                      <a:r>
+                        <a:rPr/>
+                        <a:t>4810</a:t>
+                      </a:r>
+                    </a:p>
+                  </a:txBody>
+                </a:tc>
+                <a:tc>
+                  <a:txBody>
+                    <a:bodyPr/>
+                    <a:lstStyle/>
+                    <a:p>
+                      <a:pPr lvl="0" indent="0" marL="0">
+                        <a:buNone/>
+                      </a:pPr>
+                      <a:r>
+                        <a:rPr/>
+                        <a:t>÷ </a:t>
+                      </a:r>
+                      <a:r>
+                        <a:rPr b="1"/>
+                        <a:t>299</a:t>
+                      </a:r>
+                      <a:r>
+                        <a:rPr/>
+                        <a:t> (quadrats)</a:t>
+                      </a:r>
+                    </a:p>
+                  </a:txBody>
+                </a:tc>
+                <a:tc>
+                  <a:txBody>
+                    <a:bodyPr/>
+                    <a:lstStyle/>
+                    <a:p>
+                      <a:pPr lvl="0" indent="0" marL="0">
+                        <a:buNone/>
+                      </a:pPr>
+                      <a:r>
+                        <a:rPr b="1"/>
+                        <a:t>16.11</a:t>
+                      </a:r>
+                    </a:p>
+                  </a:txBody>
+                </a:tc>
+                <a:tc>
+                  <a:txBody>
+                    <a:bodyPr/>
+                    <a:lstStyle/>
+                    <a:p>
+                      <a:pPr lvl="0" indent="0" marL="0">
+                        <a:buNone/>
+                      </a:pPr>
+                      <a:r>
+                        <a:rPr/>
+                        <a:t>0.00000007</a:t>
+                      </a:r>
+                    </a:p>
+                  </a:txBody>
+                </a:tc>
+              </a:tr>
+              <a:tr h="0">
+                <a:tc>
+                  <a:txBody>
+                    <a:bodyPr/>
+                    <a:lstStyle/>
+                    <a:p>
+                      <a:pPr lvl="0" indent="0" marL="0">
+                        <a:buNone/>
+                      </a:pPr>
+                      <a:r>
+                        <a:rPr b="1"/>
+                        <a:t>Nested</a:t>
+                      </a:r>
+                    </a:p>
+                  </a:txBody>
+                </a:tc>
+                <a:tc>
+                  <a:txBody>
+                    <a:bodyPr/>
+                    <a:lstStyle/>
+                    <a:p>
+                      <a:pPr lvl="0" indent="0" marL="0">
+                        <a:buNone/>
+                      </a:pPr>
+                      <a:r>
+                        <a:rPr/>
+                        <a:t>4810</a:t>
+                      </a:r>
+                    </a:p>
+                  </a:txBody>
+                </a:tc>
+                <a:tc>
+                  <a:txBody>
+                    <a:bodyPr/>
+                    <a:lstStyle/>
+                    <a:p>
+                      <a:pPr lvl="0" indent="0" marL="0">
+                        <a:buNone/>
+                      </a:pPr>
+                      <a:r>
+                        <a:rPr/>
+                        <a:t>÷ </a:t>
+                      </a:r>
+                      <a:r>
+                        <a:rPr b="1"/>
+                        <a:t>1770</a:t>
+                      </a:r>
+                      <a:r>
+                        <a:rPr/>
+                        <a:t> (patches)</a:t>
+                      </a:r>
+                    </a:p>
+                  </a:txBody>
+                </a:tc>
+                <a:tc>
+                  <a:txBody>
+                    <a:bodyPr/>
+                    <a:lstStyle/>
+                    <a:p>
+                      <a:pPr lvl="0" indent="0" marL="0">
+                        <a:buNone/>
+                      </a:pPr>
+                      <a:r>
+                        <a:rPr b="1"/>
+                        <a:t>2.72</a:t>
+                      </a:r>
+                    </a:p>
+                  </a:txBody>
+                </a:tc>
+                <a:tc>
+                  <a:txBody>
+                    <a:bodyPr/>
+                    <a:lstStyle/>
+                    <a:p>
+                      <a:pPr lvl="0" indent="0" marL="0">
+                        <a:buNone/>
+                      </a:pPr>
+                      <a:r>
+                        <a:rPr/>
+                        <a:t>0.091</a:t>
+                      </a:r>
+                    </a:p>
+                  </a:txBody>
+                </a:tc>
+              </a:tr>
+            </a:tbl>
+          </a:graphicData>
+        </a:graphic>
+      </p:graphicFrame>
+      <p:sp>
+        <p:nvSpPr>
+          <p:cNvPr id="4" name="Content Placeholder 3"/>
+          <p:cNvSpPr>
+            <a:spLocks noGrp="1"/>
+          </p:cNvSpPr>
+          <p:nvPr>
+            <p:ph idx="2" sz="half"/>
+          </p:nvPr>
+        </p:nvSpPr>
+        <p:spPr/>
+        <p:txBody>
+          <a:bodyPr/>
+          <a:lstStyle/>
+          <a:p>
+            <a:pPr lvl="0" indent="0" marL="1270000">
+              <a:buNone/>
+            </a:pPr>
+            <a:r>
+              <a:rPr sz="2000" b="1"/>
+              <a:t>Important</a:t>
+            </a:r>
+          </a:p>
+          <a:p>
+            <a:pPr lvl="0" indent="0" marL="1270000">
+              <a:buNone/>
+            </a:pPr>
+            <a:r>
+              <a:rPr sz="2000" b="1"/>
+              <a:t>The p-value moved by six orders of magnitude.</a:t>
+            </a:r>
+          </a:p>
+          <a:p>
+            <a:pPr lvl="0" indent="0" marL="1270000">
+              <a:buNone/>
+            </a:pPr>
+            <a:r>
+              <a:rPr sz="2000"/>
+              <a:t>The naive model tested the treatment against variation </a:t>
+            </a:r>
+            <a:r>
+              <a:rPr sz="2000" i="1"/>
+              <a:t>between quadrats within a patch</a:t>
+            </a:r>
+            <a:r>
+              <a:rPr sz="2000"/>
+              <a:t> — but quadrats are not what we assigned treatments to. </a:t>
+            </a:r>
+            <a:r>
+              <a:rPr sz="2000" b="1"/>
+              <a:t>Patches are.</a:t>
+            </a:r>
+          </a:p>
+          <a:p>
+            <a:pPr lvl="0" indent="0" marL="1270000">
+              <a:buNone/>
+            </a:pPr>
+            <a:r>
+              <a:rPr sz="2000"/>
+              <a:t>There are 80 quadrats but only </a:t>
+            </a:r>
+            <a:r>
+              <a:rPr sz="2000" b="1"/>
+              <a:t>16 patches</a:t>
+            </a:r>
+            <a:r>
+              <a:rPr sz="2000"/>
+              <a:t>, four per treatment. The honest test has 12 denominator degrees of freedom, not 64.</a:t>
+            </a:r>
+          </a:p>
+        </p:txBody>
+      </p:sp>
+      <p:sp>
+        <p:nvSpPr>
+          <p:cNvPr id="5" name="Text Placeholder 4"/>
+          <p:cNvSpPr>
+            <a:spLocks noGrp="1"/>
+          </p:cNvSpPr>
+          <p:nvPr>
+            <p:ph idx="3" sz="quarter" type="body"/>
+          </p:nvPr>
+        </p:nvSpPr>
+        <p:spPr/>
+        <p:txBody>
+          <a:bodyPr/>
+          <a:lstStyle/>
+          <a:p>
+            <a:pPr lvl="0" indent="0" marL="1270000">
+              <a:buNone/>
+            </a:pPr>
+            <a:r>
+              <a:rPr sz="2000" b="1"/>
+              <a:t>Note</a:t>
+            </a:r>
+          </a:p>
+          <a:p>
+            <a:pPr lvl="0" indent="0" marL="1270000">
+              <a:buNone/>
+            </a:pPr>
+            <a:r>
+              <a:rPr sz="2000" b="1"/>
+              <a:t>✅ How to find the right denominator</a:t>
+            </a:r>
+          </a:p>
+          <a:p>
+            <a:pPr lvl="0" indent="0" marL="1270000">
+              <a:buNone/>
+            </a:pPr>
+            <a:r>
+              <a:rPr sz="2000"/>
+              <a:t>Ask: </a:t>
+            </a:r>
+            <a:r>
+              <a:rPr sz="2000" b="1"/>
+              <a:t>what did I randomly assign the treatment to?</a:t>
+            </a:r>
+          </a:p>
+          <a:p>
+            <a:pPr lvl="0" indent="0" marL="1270000">
+              <a:buNone/>
+            </a:pPr>
+            <a:r>
+              <a:rPr sz="2000"/>
+              <a:t>That unit — patch here — supplies the error term. Everything measured </a:t>
+            </a:r>
+            <a:r>
+              <a:rPr sz="2000" i="1"/>
+              <a:t>inside</a:t>
+            </a:r>
+            <a:r>
+              <a:rPr sz="2000"/>
+              <a:t> it is a subsample, and subsamples tell you about measurement noise, not about treatment effects.</a:t>
+            </a:r>
+          </a:p>
+          <a:p>
+            <a:pPr lvl="0" indent="0" marL="1270000">
+              <a:buNone/>
+            </a:pPr>
+            <a:r>
+              <a:rPr sz="2000" b="1"/>
+              <a:t>Tip</a:t>
+            </a:r>
+          </a:p>
+          <a:p>
+            <a:pPr lvl="0" indent="0" marL="1270000">
+              <a:buNone/>
+            </a:pPr>
+            <a:r>
+              <a:rPr sz="2000" b="1"/>
+              <a:t>🖐 Notice </a:t>
+            </a:r>
+            <a:r>
+              <a:rPr sz="2000" b="1">
+                <a:latin typeface="Courier"/>
+              </a:rPr>
+              <a:t>MS(patch)</a:t>
+            </a:r>
+            <a:r>
+              <a:rPr sz="2000" b="1"/>
+              <a:t> is large</a:t>
+            </a:r>
+          </a:p>
+          <a:p>
+            <a:pPr lvl="0" indent="0" marL="1270000">
+              <a:buNone/>
+            </a:pPr>
+            <a:r>
+              <a:rPr sz="2000"/>
+              <a:t>1770 vs 299 — patches genuinely differ from one another. That variability is real biology, and the nested model makes you pay for it. The naive model pretended it was not there.</a:t>
+            </a:r>
+          </a:p>
+        </p:txBody>
+      </p:sp>
+    </p:spTree>
+  </p:cSld>
+</p:sld>
+</file>
+
+<file path=ppt/slides/slide42.xml><?xml version="1.0" encoding="utf-8"?>
+<p:sld xmlns:a="http://schemas.openxmlformats.org/drawingml/2006/main" xmlns:r="http://schemas.openxmlformats.org/officeDocument/2006/relationships" xmlns:p="http://schemas.openxmlformats.org/presentationml/2006/main">
+  <p:cSld>
+    <p:spTree>
+      <p:nvGrpSpPr>
+        <p:cNvPr id="1" name=""/>
+        <p:cNvGrpSpPr/>
+        <p:nvPr/>
+      </p:nvGrpSpPr>
+      <p:grpSpPr>
+        <a:xfrm>
+          <a:off x="0" y="0"/>
+          <a:ext cx="0" cy="0"/>
+          <a:chOff x="0" y="0"/>
+          <a:chExt cx="0" cy="0"/>
+        </a:xfrm>
+      </p:grpSpPr>
+      <p:sp>
+        <p:nvSpPr>
+          <p:cNvPr id="2" name="Title 1"/>
+          <p:cNvSpPr>
+            <a:spLocks noGrp="1"/>
+          </p:cNvSpPr>
+          <p:nvPr>
+            <p:ph type="title"/>
+          </p:nvPr>
+        </p:nvSpPr>
+        <p:spPr>
+          <a:xfrm>
+            <a:off x="139485" y="78119"/>
+            <a:ext cx="8229600" cy="607682"/>
+          </a:xfrm>
+        </p:spPr>
+        <p:txBody>
+          <a:bodyPr/>
+          <a:lstStyle/>
+          <a:p>
+            <a:pPr lvl="0" indent="0" marL="0">
+              <a:buNone/>
+            </a:pPr>
+            <a:r>
+              <a:rPr/>
+              <a:t>Where You Have Seen This Before</a:t>
+            </a:r>
+          </a:p>
+        </p:txBody>
+      </p:sp>
+      <p:sp>
+        <p:nvSpPr>
+          <p:cNvPr id="3" name="Text Placeholder 2"/>
+          <p:cNvSpPr>
+            <a:spLocks noGrp="1"/>
+          </p:cNvSpPr>
+          <p:nvPr>
+            <p:ph idx="1" type="body"/>
+          </p:nvPr>
+        </p:nvSpPr>
+        <p:spPr/>
+        <p:txBody>
+          <a:bodyPr/>
+          <a:lstStyle/>
+          <a:p>
+            <a:pPr lvl="0" indent="0" marL="0">
+              <a:buNone/>
+            </a:pPr>
+            <a:r>
+              <a:rPr/>
+              <a:t>This is the </a:t>
+            </a:r>
+            <a:r>
+              <a:rPr b="1"/>
+              <a:t>pine needle problem</a:t>
+            </a:r>
+            <a:r>
+              <a:rPr/>
+              <a:t> again, one level up:</a:t>
+            </a:r>
+          </a:p>
+        </p:txBody>
+      </p:sp>
+      <p:graphicFrame>
+        <p:nvGraphicFramePr>
+          <p:cNvPr id="6" name="Content Placeholder 5"/>
+          <p:cNvGraphicFramePr>
+            <a:graphicFrameLocks noGrp="1"/>
+          </p:cNvGraphicFramePr>
+          <p:nvPr>
+            <p:ph idx="1"/>
+          </p:nvPr>
+        </p:nvGraphicFramePr>
+        <p:xfrm>
+          <a:off x="127000" y="1270000"/>
+          <a:ext cx="4432300" cy="3302000"/>
+        </p:xfrm>
+        <a:graphic>
+          <a:graphicData uri="http://schemas.openxmlformats.org/drawingml/2006/table">
+            <a:tbl>
+              <a:tblPr firstRow="1" bandRow="1">
+                <a:tableStyleId>{5C22544A-7EE6-4342-B048-85BDC9FD1C3A}</a:tableStyleId>
+              </a:tblPr>
+              <a:tblGrid>
+                <a:gridCol w="2209800"/>
+                <a:gridCol w="2209800"/>
+              </a:tblGrid>
+              <a:tr h="0">
+                <a:tc>
+                  <a:txBody>
+                    <a:bodyPr/>
+                    <a:lstStyle/>
+                    <a:p>
+                      <a:pPr lvl="0" indent="0" marL="0">
+                        <a:buNone/>
+                      </a:pPr>
+                      <a:r>
+                        <a:rPr/>
+                        <a:t>Our pine study</a:t>
+                      </a:r>
+                    </a:p>
+                  </a:txBody>
+                  <a:tcPr/>
+                </a:tc>
+                <a:tc>
+                  <a:txBody>
+                    <a:bodyPr/>
+                    <a:lstStyle/>
+                    <a:p>
+                      <a:pPr lvl="0" indent="0" marL="0">
+                        <a:buNone/>
+                      </a:pPr>
+                      <a:r>
+                        <a:rPr/>
+                        <a:t>This urchin study</a:t>
+                      </a:r>
+                    </a:p>
+                  </a:txBody>
+                  <a:tcPr/>
+                </a:tc>
+              </a:tr>
+              <a:tr h="0">
+                <a:tc>
+                  <a:txBody>
+                    <a:bodyPr/>
+                    <a:lstStyle/>
+                    <a:p>
+                      <a:pPr lvl="0" indent="0" marL="0">
+                        <a:buNone/>
+                      </a:pPr>
+                      <a:r>
+                        <a:rPr/>
+                        <a:t>8 needles per side</a:t>
+                      </a:r>
+                    </a:p>
+                  </a:txBody>
+                </a:tc>
+                <a:tc>
+                  <a:txBody>
+                    <a:bodyPr/>
+                    <a:lstStyle/>
+                    <a:p>
+                      <a:pPr lvl="0" indent="0" marL="0">
+                        <a:buNone/>
+                      </a:pPr>
+                      <a:r>
+                        <a:rPr/>
+                        <a:t>5 quadrats per patch</a:t>
+                      </a:r>
+                    </a:p>
+                  </a:txBody>
+                </a:tc>
+              </a:tr>
+              <a:tr h="0">
+                <a:tc>
+                  <a:txBody>
+                    <a:bodyPr/>
+                    <a:lstStyle/>
+                    <a:p>
+                      <a:pPr lvl="0" indent="0" marL="0">
+                        <a:buNone/>
+                      </a:pPr>
+                      <a:r>
+                        <a:rPr/>
+                        <a:t>within one tree</a:t>
+                      </a:r>
+                    </a:p>
+                  </a:txBody>
+                </a:tc>
+                <a:tc>
+                  <a:txBody>
+                    <a:bodyPr/>
+                    <a:lstStyle/>
+                    <a:p>
+                      <a:pPr lvl="0" indent="0" marL="0">
+                        <a:buNone/>
+                      </a:pPr>
+                      <a:r>
+                        <a:rPr/>
+                        <a:t>within one patch</a:t>
+                      </a:r>
+                    </a:p>
+                  </a:txBody>
+                </a:tc>
+              </a:tr>
+              <a:tr h="0">
+                <a:tc>
+                  <a:txBody>
+                    <a:bodyPr/>
+                    <a:lstStyle/>
+                    <a:p>
+                      <a:pPr lvl="0" indent="0" marL="0">
+                        <a:buNone/>
+                      </a:pPr>
+                      <a:r>
+                        <a:rPr b="1"/>
+                        <a:t>4 trees</a:t>
+                      </a:r>
+                      <a:r>
+                        <a:rPr/>
+                        <a:t> are the replicates</a:t>
+                      </a:r>
+                    </a:p>
+                  </a:txBody>
+                </a:tc>
+                <a:tc>
+                  <a:txBody>
+                    <a:bodyPr/>
+                    <a:lstStyle/>
+                    <a:p>
+                      <a:pPr lvl="0" indent="0" marL="0">
+                        <a:buNone/>
+                      </a:pPr>
+                      <a:r>
+                        <a:rPr b="1"/>
+                        <a:t>16 patches</a:t>
+                      </a:r>
+                      <a:r>
+                        <a:rPr/>
+                        <a:t> are the replicates</a:t>
+                      </a:r>
+                    </a:p>
+                  </a:txBody>
+                </a:tc>
+              </a:tr>
+              <a:tr h="0">
+                <a:tc>
+                  <a:txBody>
+                    <a:bodyPr/>
+                    <a:lstStyle/>
+                    <a:p>
+                      <a:pPr lvl="0" indent="0" marL="0">
+                        <a:buNone/>
+                      </a:pPr>
+                      <a:r>
+                        <a:rPr/>
+                        <a:t>64 rows, n = 4</a:t>
+                      </a:r>
+                    </a:p>
+                  </a:txBody>
+                </a:tc>
+                <a:tc>
+                  <a:txBody>
+                    <a:bodyPr/>
+                    <a:lstStyle/>
+                    <a:p>
+                      <a:pPr lvl="0" indent="0" marL="0">
+                        <a:buNone/>
+                      </a:pPr>
+                      <a:r>
+                        <a:rPr/>
+                        <a:t>80 rows, n = 16</a:t>
+                      </a:r>
+                    </a:p>
+                  </a:txBody>
+                </a:tc>
+              </a:tr>
+            </a:tbl>
+          </a:graphicData>
+        </a:graphic>
+      </p:graphicFrame>
+      <p:sp>
+        <p:nvSpPr>
+          <p:cNvPr id="4" name="Content Placeholder 3"/>
+          <p:cNvSpPr>
+            <a:spLocks noGrp="1"/>
+          </p:cNvSpPr>
+          <p:nvPr>
+            <p:ph idx="2" sz="half"/>
+          </p:nvPr>
+        </p:nvSpPr>
+        <p:spPr/>
+        <p:txBody>
+          <a:bodyPr/>
+          <a:lstStyle/>
+          <a:p>
+            <a:pPr lvl="0" indent="0" marL="0">
+              <a:buNone/>
+            </a:pPr>
+            <a:r>
+              <a:rPr/>
+              <a:t>In Week 1 we solved it by </a:t>
+            </a:r>
+            <a:r>
+              <a:rPr b="1"/>
+              <a:t>averaging</a:t>
+            </a:r>
+            <a:r>
+              <a:rPr/>
+              <a:t> each tree to one number. That works, and it is honest.</a:t>
+            </a:r>
+          </a:p>
+          <a:p>
+            <a:pPr lvl="0" indent="0" marL="0">
+              <a:buNone/>
+            </a:pPr>
+            <a:r>
+              <a:rPr/>
+              <a:t>A nested ANOVA does something better: it keeps every quadrat, estimates </a:t>
+            </a:r>
+            <a:r>
+              <a:rPr i="1"/>
+              <a:t>both</a:t>
+            </a:r>
+            <a:r>
+              <a:rPr/>
+              <a:t> levels of variability, and still tests the treatment against the right error term.</a:t>
+            </a:r>
+          </a:p>
+          <a:p>
+            <a:pPr lvl="0" indent="0" marL="1270000">
+              <a:buNone/>
+            </a:pPr>
+            <a:r>
+              <a:rPr sz="2000" b="1"/>
+              <a:t>Note</a:t>
+            </a:r>
+          </a:p>
+          <a:p>
+            <a:pPr lvl="0" indent="0" marL="1270000">
+              <a:buNone/>
+            </a:pPr>
+            <a:r>
+              <a:rPr sz="2000" b="1"/>
+              <a:t>✅ Key idea</a:t>
+            </a:r>
+          </a:p>
+          <a:p>
+            <a:pPr lvl="0" indent="0" marL="1270000">
+              <a:buNone/>
+            </a:pPr>
+            <a:r>
+              <a:rPr sz="2000"/>
+              <a:t>Averaging throws the subsamples away. Nesting </a:t>
+            </a:r>
+            <a:r>
+              <a:rPr sz="2000" i="1"/>
+              <a:t>uses</a:t>
+            </a:r>
+            <a:r>
+              <a:rPr sz="2000"/>
+              <a:t> them — to estimate how noisy your measurements are — while still refusing to count them as replicates.</a:t>
+            </a:r>
+          </a:p>
+        </p:txBody>
+      </p:sp>
+      <p:sp>
+        <p:nvSpPr>
+          <p:cNvPr id="5" name="Text Placeholder 4"/>
+          <p:cNvSpPr>
+            <a:spLocks noGrp="1"/>
+          </p:cNvSpPr>
+          <p:nvPr>
+            <p:ph idx="3" sz="quarter" type="body"/>
+          </p:nvPr>
+        </p:nvSpPr>
+        <p:spPr/>
+        <p:txBody>
+          <a:bodyPr/>
+          <a:lstStyle/>
+          <a:p>
+            <a:pPr lvl="0" indent="0" marL="1270000">
+              <a:buNone/>
+            </a:pPr>
+            <a:r>
+              <a:rPr sz="2000" b="1"/>
+              <a:t>Warning</a:t>
+            </a:r>
+          </a:p>
+          <a:p>
+            <a:pPr lvl="0" indent="0" marL="1270000">
+              <a:buNone/>
+            </a:pPr>
+            <a:r>
+              <a:rPr sz="2000" b="1"/>
+              <a:t>⚠️ The limit of </a:t>
+            </a:r>
+            <a:r>
+              <a:rPr sz="2000" b="1">
+                <a:latin typeface="Courier"/>
+              </a:rPr>
+              <a:t>aov(Error(...))</a:t>
+            </a:r>
+          </a:p>
+          <a:p>
+            <a:pPr lvl="0" indent="0" marL="1270000">
+              <a:buNone/>
+            </a:pPr>
+            <a:r>
+              <a:rPr sz="2000"/>
+              <a:t>This syntax needs a (near-)balanced design. Ours is perfectly balanced — 4 patches per treatment, 5 quadrats per patch — so it works.</a:t>
+            </a:r>
+          </a:p>
+          <a:p>
+            <a:pPr lvl="0" indent="0" marL="1270000">
+              <a:buNone/>
+            </a:pPr>
+            <a:r>
+              <a:rPr sz="2000"/>
+              <a:t>Real data usually is not. That is the problem </a:t>
+            </a:r>
+            <a:r>
+              <a:rPr sz="2000" b="1"/>
+              <a:t>mixed models</a:t>
+            </a:r>
+            <a:r>
+              <a:rPr sz="2000"/>
+              <a:t> solve, and it is where we go next.</a:t>
+            </a:r>
+          </a:p>
+        </p:txBody>
+      </p:sp>
+    </p:spTree>
+  </p:cSld>
+</p:sld>
+</file>
+
+<file path=ppt/slides/slide43.xml><?xml version="1.0" encoding="utf-8"?>
+<p:sld xmlns:a="http://schemas.openxmlformats.org/drawingml/2006/main" xmlns:r="http://schemas.openxmlformats.org/officeDocument/2006/relationships" xmlns:p="http://schemas.openxmlformats.org/presentationml/2006/main">
+  <p:cSld>
+    <p:spTree>
+      <p:nvGrpSpPr>
+        <p:cNvPr id="1" name=""/>
+        <p:cNvGrpSpPr/>
+        <p:nvPr/>
+      </p:nvGrpSpPr>
+      <p:grpSpPr>
+        <a:xfrm>
+          <a:off x="0" y="0"/>
+          <a:ext cx="0" cy="0"/>
+          <a:chOff x="0" y="0"/>
+          <a:chExt cx="0" cy="0"/>
+        </a:xfrm>
+      </p:grpSpPr>
+      <p:sp>
+        <p:nvSpPr>
+          <p:cNvPr id="2" name="Title 1"/>
+          <p:cNvSpPr>
+            <a:spLocks noGrp="1"/>
+          </p:cNvSpPr>
+          <p:nvPr>
+            <p:ph type="title"/>
+          </p:nvPr>
+        </p:nvSpPr>
+        <p:spPr>
+          <a:xfrm>
+            <a:off x="0" y="0"/>
+            <a:ext cx="9144000" cy="602780"/>
+          </a:xfrm>
+          <a:solidFill>
+            <a:srgbClr val="70121D"/>
+          </a:solidFill>
+        </p:spPr>
+        <p:txBody>
+          <a:bodyPr/>
+          <a:lstStyle/>
+          <a:p>
+            <a:pPr lvl="0" indent="0" marL="0">
+              <a:buNone/>
+            </a:pPr>
+            <a:r>
+              <a:rPr/>
+              <a:t>How Do I Know If My Design Is Nested?</a:t>
+            </a:r>
+          </a:p>
+        </p:txBody>
+      </p:sp>
+      <p:sp>
+        <p:nvSpPr>
+          <p:cNvPr id="3" name="Content Placeholder 2"/>
+          <p:cNvSpPr>
+            <a:spLocks noGrp="1"/>
+          </p:cNvSpPr>
+          <p:nvPr>
+            <p:ph idx="1" sz="half"/>
+          </p:nvPr>
+        </p:nvSpPr>
+        <p:spPr/>
+        <p:txBody>
+          <a:bodyPr/>
+          <a:lstStyle/>
+          <a:p>
+            <a:pPr lvl="0" indent="0" marL="0">
+              <a:buNone/>
+            </a:pPr>
+            <a:r>
+              <a:rPr/>
+              <a:t>Three questions, in order. Ask them of </a:t>
+            </a:r>
+            <a:r>
+              <a:rPr b="1"/>
+              <a:t>your own</a:t>
+            </a:r>
+            <a:r>
+              <a:rPr/>
+              <a:t> data before you fit anything.</a:t>
+            </a:r>
+          </a:p>
+          <a:p>
+            <a:pPr lvl="0" indent="0" marL="0">
+              <a:buNone/>
+            </a:pPr>
+            <a:r>
+              <a:rPr b="1"/>
+              <a:t>1. What did I apply the treatment to?</a:t>
+            </a:r>
+            <a:r>
+              <a:rPr/>
+              <a:t> → Whole patches. Not quadrats.</a:t>
+            </a:r>
+          </a:p>
+          <a:p>
+            <a:pPr lvl="0" indent="0" marL="0">
+              <a:buNone/>
+            </a:pPr>
+            <a:r>
+              <a:rPr b="1"/>
+              <a:t>2. Does every level of B appear under every level of A?</a:t>
+            </a:r>
+            <a:r>
+              <a:rPr/>
+              <a:t> → Patch 7 only ever received the 66% density. It cannot appear under 100%. → </a:t>
+            </a:r>
+            <a:r>
+              <a:rPr b="1"/>
+              <a:t>No ⇒ nested.</a:t>
+            </a:r>
+            <a:r>
+              <a:rPr/>
+              <a:t> (Yes ⇒ crossed/factorial.)</a:t>
+            </a:r>
+          </a:p>
+          <a:p>
+            <a:pPr lvl="0" indent="0" marL="0">
+              <a:buNone/>
+            </a:pPr>
+            <a:r>
+              <a:rPr b="1"/>
+              <a:t>3. How many of those units do I have per treatment?</a:t>
+            </a:r>
+            <a:r>
+              <a:rPr/>
+              <a:t> → 4 patches, not 20 quadrats. </a:t>
+            </a:r>
+            <a:r>
+              <a:rPr b="1"/>
+              <a:t>That is your n.</a:t>
+            </a:r>
+          </a:p>
+          <a:p>
+            <a:pPr lvl="0" indent="0" marL="1270000">
+              <a:buNone/>
+            </a:pPr>
+            <a:r>
+              <a:rPr sz="2000" b="1"/>
+              <a:t>Important</a:t>
+            </a:r>
+          </a:p>
+          <a:p>
+            <a:pPr lvl="0" indent="0" marL="1270000">
+              <a:buNone/>
+            </a:pPr>
+            <a:r>
+              <a:rPr sz="2000" b="1"/>
+              <a:t>The answer to Q1 is your error term.</a:t>
+            </a:r>
+          </a:p>
+          <a:p>
+            <a:pPr lvl="0" indent="0">
+              <a:buNone/>
+            </a:pPr>
+            <a:r>
+              <a:rPr>
+                <a:solidFill>
+                  <a:srgbClr val="4758AB"/>
+                </a:solidFill>
+                <a:latin typeface="Courier"/>
+              </a:rPr>
+              <a:t>aov</a:t>
+            </a:r>
+            <a:r>
+              <a:rPr>
+                <a:solidFill>
+                  <a:srgbClr val="003B4F"/>
+                </a:solidFill>
+                <a:latin typeface="Courier"/>
+              </a:rPr>
+              <a:t>(algae </a:t>
+            </a:r>
+            <a:r>
+              <a:rPr>
+                <a:solidFill>
+                  <a:srgbClr val="5E5E5E"/>
+                </a:solidFill>
+                <a:latin typeface="Courier"/>
+              </a:rPr>
+              <a:t>~</a:t>
+            </a:r>
+            <a:r>
+              <a:rPr>
+                <a:solidFill>
+                  <a:srgbClr val="003B4F"/>
+                </a:solidFill>
+                <a:latin typeface="Courier"/>
+              </a:rPr>
+              <a:t> treat </a:t>
+            </a:r>
+            <a:r>
+              <a:rPr>
+                <a:solidFill>
+                  <a:srgbClr val="5E5E5E"/>
+                </a:solidFill>
+                <a:latin typeface="Courier"/>
+              </a:rPr>
+              <a:t>+</a:t>
+            </a:r>
+            <a:r>
+              <a:rPr>
+                <a:solidFill>
+                  <a:srgbClr val="003B4F"/>
+                </a:solidFill>
+                <a:latin typeface="Courier"/>
+              </a:rPr>
+              <a:t> </a:t>
+            </a:r>
+            <a:r>
+              <a:rPr>
+                <a:solidFill>
+                  <a:srgbClr val="4758AB"/>
+                </a:solidFill>
+                <a:latin typeface="Courier"/>
+              </a:rPr>
+              <a:t>Error</a:t>
+            </a:r>
+            <a:r>
+              <a:rPr>
+                <a:solidFill>
+                  <a:srgbClr val="003B4F"/>
+                </a:solidFill>
+                <a:latin typeface="Courier"/>
+              </a:rPr>
+              <a:t>(patch), </a:t>
+            </a:r>
+            <a:r>
+              <a:rPr>
+                <a:solidFill>
                   <a:srgbClr val="657422"/>
                 </a:solidFill>
                 <a:latin typeface="Courier"/>
@@ -9466,6 +10959,537 @@
             <a:r>
               <a:rPr>
                 <a:solidFill>
+                  <a:srgbClr val="5E5E5E"/>
+                </a:solidFill>
+                <a:latin typeface="Courier"/>
+              </a:rPr>
+              <a:t>#                   ^^^^^^^^^^^^</a:t>
+            </a:r>
+            <a:br/>
+            <a:r>
+              <a:rPr>
+                <a:solidFill>
+                  <a:srgbClr val="5E5E5E"/>
+                </a:solidFill>
+                <a:latin typeface="Courier"/>
+              </a:rPr>
+              <a:t>#                   the thing treatments were assigned to</a:t>
+            </a:r>
+          </a:p>
+        </p:txBody>
+      </p:sp>
+      <p:sp>
+        <p:nvSpPr>
+          <p:cNvPr id="4" name="Content Placeholder 3"/>
+          <p:cNvSpPr>
+            <a:spLocks noGrp="1"/>
+          </p:cNvSpPr>
+          <p:nvPr>
+            <p:ph idx="2" sz="half"/>
+          </p:nvPr>
+        </p:nvSpPr>
+        <p:spPr/>
+        <p:txBody>
+          <a:bodyPr/>
+          <a:lstStyle/>
+          <a:p>
+            <a:pPr lvl="0" indent="0" marL="1270000">
+              <a:buNone/>
+            </a:pPr>
+            <a:r>
+              <a:rPr sz="2000" b="1"/>
+              <a:t>Tip</a:t>
+            </a:r>
+          </a:p>
+          <a:p>
+            <a:pPr lvl="0" indent="0" marL="1270000">
+              <a:buNone/>
+            </a:pPr>
+            <a:r>
+              <a:rPr sz="2000" b="1"/>
+              <a:t>🖐 A quick tell</a:t>
+            </a:r>
+          </a:p>
+          <a:p>
+            <a:pPr lvl="0" indent="0" marL="1270000">
+              <a:buNone/>
+            </a:pPr>
+            <a:r>
+              <a:rPr sz="2000"/>
+              <a:t>If two rows of your data share a value for the thing you randomized, they are </a:t>
+            </a:r>
+            <a:r>
+              <a:rPr sz="2000" b="1"/>
+              <a:t>not</a:t>
+            </a:r>
+            <a:r>
+              <a:rPr sz="2000"/>
+              <a:t> independent replicates of it.</a:t>
+            </a:r>
+          </a:p>
+          <a:p>
+            <a:pPr lvl="0" indent="0" marL="1270000">
+              <a:buNone/>
+            </a:pPr>
+            <a:r>
+              <a:rPr sz="2000"/>
+              <a:t>Two quadrats in patch 3 share patch 3. Two needles on one tree share that tree.</a:t>
+            </a:r>
+          </a:p>
+          <a:p>
+            <a:pPr lvl="0" indent="0" marL="1270000">
+              <a:buNone/>
+            </a:pPr>
+            <a:r>
+              <a:rPr sz="2000" b="1"/>
+              <a:t>Warning</a:t>
+            </a:r>
+          </a:p>
+          <a:p>
+            <a:pPr lvl="0" indent="0" marL="1270000">
+              <a:buNone/>
+            </a:pPr>
+            <a:r>
+              <a:rPr sz="2000" b="1"/>
+              <a:t>⚠️ Nested factors are random</a:t>
+            </a:r>
+          </a:p>
+          <a:p>
+            <a:pPr lvl="0" indent="0" marL="1270000">
+              <a:buNone/>
+            </a:pPr>
+            <a:r>
+              <a:rPr sz="2000"/>
+              <a:t>We are not asking “is patch 7 different from patch 12?” — those specific patches are of no interest. They are a </a:t>
+            </a:r>
+            <a:r>
+              <a:rPr sz="2000" b="1"/>
+              <a:t>sample of possible patches</a:t>
+            </a:r>
+            <a:r>
+              <a:rPr sz="2000"/>
+              <a:t>, so </a:t>
+            </a:r>
+            <a:r>
+              <a:rPr sz="2000">
+                <a:latin typeface="Courier"/>
+              </a:rPr>
+              <a:t>patch</a:t>
+            </a:r>
+            <a:r>
+              <a:rPr sz="2000"/>
+              <a:t> enters as a random effect.</a:t>
+            </a:r>
+          </a:p>
+          <a:p>
+            <a:pPr lvl="0" indent="0" marL="1270000">
+              <a:buNone/>
+            </a:pPr>
+            <a:r>
+              <a:rPr sz="2000"/>
+              <a:t>The factor above it (</a:t>
+            </a:r>
+            <a:r>
+              <a:rPr sz="2000">
+                <a:latin typeface="Courier"/>
+              </a:rPr>
+              <a:t>treat</a:t>
+            </a:r>
+            <a:r>
+              <a:rPr sz="2000"/>
+              <a:t>) is fixed: those four densities are exactly the ones we care about.</a:t>
+            </a:r>
+          </a:p>
+        </p:txBody>
+      </p:sp>
+    </p:spTree>
+  </p:cSld>
+</p:sld>
+</file>
+
+<file path=ppt/slides/slide44.xml><?xml version="1.0" encoding="utf-8"?>
+<p:sld xmlns:a="http://schemas.openxmlformats.org/drawingml/2006/main" xmlns:r="http://schemas.openxmlformats.org/officeDocument/2006/relationships" xmlns:p="http://schemas.openxmlformats.org/presentationml/2006/main">
+  <p:cSld>
+    <p:spTree>
+      <p:nvGrpSpPr>
+        <p:cNvPr id="1" name=""/>
+        <p:cNvGrpSpPr/>
+        <p:nvPr/>
+      </p:nvGrpSpPr>
+      <p:grpSpPr>
+        <a:xfrm>
+          <a:off x="0" y="0"/>
+          <a:ext cx="0" cy="0"/>
+          <a:chOff x="0" y="0"/>
+          <a:chExt cx="0" cy="0"/>
+        </a:xfrm>
+      </p:grpSpPr>
+      <p:sp>
+        <p:nvSpPr>
+          <p:cNvPr id="2" name="Title 1"/>
+          <p:cNvSpPr>
+            <a:spLocks noGrp="1"/>
+          </p:cNvSpPr>
+          <p:nvPr>
+            <p:ph type="title"/>
+          </p:nvPr>
+        </p:nvSpPr>
+        <p:spPr>
+          <a:xfrm>
+            <a:off x="0" y="0"/>
+            <a:ext cx="9144000" cy="602780"/>
+          </a:xfrm>
+          <a:solidFill>
+            <a:srgbClr val="70121D"/>
+          </a:solidFill>
+        </p:spPr>
+        <p:txBody>
+          <a:bodyPr/>
+          <a:lstStyle/>
+          <a:p>
+            <a:pPr lvl="0" indent="0" marL="0">
+              <a:buNone/>
+            </a:pPr>
+            <a:r>
+              <a:rPr/>
+              <a:t>Reporting a Nested ANOVA</a:t>
+            </a:r>
+          </a:p>
+        </p:txBody>
+      </p:sp>
+      <p:sp>
+        <p:nvSpPr>
+          <p:cNvPr id="3" name="Content Placeholder 2"/>
+          <p:cNvSpPr>
+            <a:spLocks noGrp="1"/>
+          </p:cNvSpPr>
+          <p:nvPr>
+            <p:ph idx="1" sz="half"/>
+          </p:nvPr>
+        </p:nvSpPr>
+        <p:spPr/>
+        <p:txBody>
+          <a:bodyPr/>
+          <a:lstStyle/>
+          <a:p>
+            <a:pPr lvl="0" indent="0" marL="1270000">
+              <a:buNone/>
+            </a:pPr>
+            <a:r>
+              <a:rPr sz="2000" b="1"/>
+              <a:t>Note</a:t>
+            </a:r>
+          </a:p>
+          <a:p>
+            <a:pPr lvl="0" indent="0" marL="1270000">
+              <a:buNone/>
+            </a:pPr>
+            <a:r>
+              <a:rPr sz="2000" b="1"/>
+              <a:t>How to report this result</a:t>
+            </a:r>
+          </a:p>
+          <a:p>
+            <a:pPr lvl="0" indent="0" marL="1270000">
+              <a:buNone/>
+            </a:pPr>
+            <a:r>
+              <a:rPr sz="2000"/>
+              <a:t>“Algal cover did not differ significantly among urchin density treatments (nested ANOVA, </a:t>
+            </a:r>
+            <a:r>
+              <a:rPr sz="2000" b="1"/>
+              <a:t>F₃,₁₂ = 2.72, p = 0.091</a:t>
+            </a:r>
+            <a:r>
+              <a:rPr sz="2000"/>
+              <a:t>), with patches treated as a random factor nested within treatment. Variation among patches within treatments was substantial, accounting for approximately </a:t>
+            </a:r>
+            <a:r>
+              <a:rPr sz="2000" b="1"/>
+              <a:t>50% of the total variance</a:t>
+            </a:r>
+            <a:r>
+              <a:rPr sz="2000"/>
+              <a:t> (σ²_patch = 294, σ²_within = 299; n = 4 patches per treatment, 5 quadrats per patch).”</a:t>
+            </a:r>
+          </a:p>
+          <a:p>
+            <a:pPr lvl="0" indent="0" marL="0">
+              <a:buNone/>
+            </a:pPr>
+            <a:r>
+              <a:rPr b="1"/>
+              <a:t>The three things people get wrong:</a:t>
+            </a:r>
+          </a:p>
+          <a:p>
+            <a:pPr lvl="0" indent="-342900" marL="342900">
+              <a:buAutoNum type="arabicPeriod"/>
+            </a:pPr>
+            <a:r>
+              <a:rPr b="1"/>
+              <a:t>The degrees of freedom.</a:t>
+            </a:r>
+            <a:r>
+              <a:rPr/>
+              <a:t> It is </a:t>
+            </a:r>
+            <a:r>
+              <a:rPr b="1"/>
+              <a:t>F(3, 12)</a:t>
+            </a:r>
+            <a:r>
+              <a:rPr/>
+              <a:t> — the denominator df comes from the </a:t>
+            </a:r>
+            <a:r>
+              <a:rPr i="1"/>
+              <a:t>patch</a:t>
+            </a:r>
+            <a:r>
+              <a:rPr/>
+              <a:t> stratum, not the 64 on the “Within” line. Reporting F(3, 64) is reporting the wrong test.</a:t>
+            </a:r>
+          </a:p>
+          <a:p>
+            <a:pPr lvl="0" indent="-342900" marL="342900">
+              <a:buAutoNum type="arabicPeriod"/>
+            </a:pPr>
+            <a:r>
+              <a:rPr b="1"/>
+              <a:t>Silence about the nesting.</a:t>
+            </a:r>
+            <a:r>
+              <a:rPr/>
+              <a:t> Say the word “nested” and name the random factor. A reader cannot tell from “F = 2.72” alone whether you did this correctly.</a:t>
+            </a:r>
+          </a:p>
+          <a:p>
+            <a:pPr lvl="0" indent="-342900" marL="342900">
+              <a:buAutoNum type="arabicPeriod"/>
+            </a:pPr>
+            <a:r>
+              <a:rPr b="1"/>
+              <a:t>Throwing away the patch variance.</a:t>
+            </a:r>
+            <a:r>
+              <a:rPr/>
+              <a:t> It is a result, not a nuisance — here it is half the story.</a:t>
+            </a:r>
+          </a:p>
+        </p:txBody>
+      </p:sp>
+      <p:sp>
+        <p:nvSpPr>
+          <p:cNvPr id="4" name="Content Placeholder 3"/>
+          <p:cNvSpPr>
+            <a:spLocks noGrp="1"/>
+          </p:cNvSpPr>
+          <p:nvPr>
+            <p:ph idx="2" sz="half"/>
+          </p:nvPr>
+        </p:nvSpPr>
+        <p:spPr/>
+        <p:txBody>
+          <a:bodyPr/>
+          <a:lstStyle/>
+          <a:p>
+            <a:pPr lvl="0" indent="0">
+              <a:buNone/>
+            </a:pPr>
+            <a:r>
+              <a:rPr>
+                <a:solidFill>
+                  <a:srgbClr val="5E5E5E"/>
+                </a:solidFill>
+                <a:latin typeface="Courier"/>
+              </a:rPr>
+              <a:t># Variance components, straight from</a:t>
+            </a:r>
+            <a:br/>
+            <a:r>
+              <a:rPr>
+                <a:solidFill>
+                  <a:srgbClr val="5E5E5E"/>
+                </a:solidFill>
+                <a:latin typeface="Courier"/>
+              </a:rPr>
+              <a:t># the two mean squares</a:t>
+            </a:r>
+            <a:br/>
+            <a:r>
+              <a:rPr>
+                <a:solidFill>
+                  <a:srgbClr val="003B4F"/>
+                </a:solidFill>
+                <a:latin typeface="Courier"/>
+              </a:rPr>
+              <a:t>MS_patch  &lt;- </a:t>
+            </a:r>
+            <a:r>
+              <a:rPr>
+                <a:solidFill>
+                  <a:srgbClr val="AD0000"/>
+                </a:solidFill>
+                <a:latin typeface="Courier"/>
+              </a:rPr>
+              <a:t>1770.2</a:t>
+            </a:r>
+            <a:r>
+              <a:rPr>
+                <a:solidFill>
+                  <a:srgbClr val="003B4F"/>
+                </a:solidFill>
+                <a:latin typeface="Courier"/>
+              </a:rPr>
+              <a:t>   </a:t>
+            </a:r>
+            <a:r>
+              <a:rPr>
+                <a:solidFill>
+                  <a:srgbClr val="5E5E5E"/>
+                </a:solidFill>
+                <a:latin typeface="Courier"/>
+              </a:rPr>
+              <a:t># Error: patch</a:t>
+            </a:r>
+            <a:br/>
+            <a:r>
+              <a:rPr>
+                <a:solidFill>
+                  <a:srgbClr val="003B4F"/>
+                </a:solidFill>
+                <a:latin typeface="Courier"/>
+              </a:rPr>
+              <a:t>MS_within &lt;- </a:t>
+            </a:r>
+            <a:r>
+              <a:rPr>
+                <a:solidFill>
+                  <a:srgbClr val="AD0000"/>
+                </a:solidFill>
+                <a:latin typeface="Courier"/>
+              </a:rPr>
+              <a:t>298.6</a:t>
+            </a:r>
+            <a:r>
+              <a:rPr>
+                <a:solidFill>
+                  <a:srgbClr val="003B4F"/>
+                </a:solidFill>
+                <a:latin typeface="Courier"/>
+              </a:rPr>
+              <a:t>    </a:t>
+            </a:r>
+            <a:r>
+              <a:rPr>
+                <a:solidFill>
+                  <a:srgbClr val="5E5E5E"/>
+                </a:solidFill>
+                <a:latin typeface="Courier"/>
+              </a:rPr>
+              <a:t># Error: Within</a:t>
+            </a:r>
+            <a:br/>
+            <a:r>
+              <a:rPr>
+                <a:solidFill>
+                  <a:srgbClr val="003B4F"/>
+                </a:solidFill>
+                <a:latin typeface="Courier"/>
+              </a:rPr>
+              <a:t>n_quad    &lt;- </a:t>
+            </a:r>
+            <a:r>
+              <a:rPr>
+                <a:solidFill>
+                  <a:srgbClr val="AD0000"/>
+                </a:solidFill>
+                <a:latin typeface="Courier"/>
+              </a:rPr>
+              <a:t>5</a:t>
+            </a:r>
+            <a:r>
+              <a:rPr>
+                <a:solidFill>
+                  <a:srgbClr val="003B4F"/>
+                </a:solidFill>
+                <a:latin typeface="Courier"/>
+              </a:rPr>
+              <a:t>        </a:t>
+            </a:r>
+            <a:r>
+              <a:rPr>
+                <a:solidFill>
+                  <a:srgbClr val="5E5E5E"/>
+                </a:solidFill>
+                <a:latin typeface="Courier"/>
+              </a:rPr>
+              <a:t># quadrats per patch</a:t>
+            </a:r>
+            <a:br/>
+            <a:br/>
+            <a:r>
+              <a:rPr>
+                <a:solidFill>
+                  <a:srgbClr val="003B4F"/>
+                </a:solidFill>
+                <a:latin typeface="Courier"/>
+              </a:rPr>
+              <a:t>var_patch  &lt;- (MS_patch </a:t>
+            </a:r>
+            <a:r>
+              <a:rPr>
+                <a:solidFill>
+                  <a:srgbClr val="5E5E5E"/>
+                </a:solidFill>
+                <a:latin typeface="Courier"/>
+              </a:rPr>
+              <a:t>-</a:t>
+            </a:r>
+            <a:r>
+              <a:rPr>
+                <a:solidFill>
+                  <a:srgbClr val="003B4F"/>
+                </a:solidFill>
+                <a:latin typeface="Courier"/>
+              </a:rPr>
+              <a:t> MS_within) </a:t>
+            </a:r>
+            <a:r>
+              <a:rPr>
+                <a:solidFill>
+                  <a:srgbClr val="5E5E5E"/>
+                </a:solidFill>
+                <a:latin typeface="Courier"/>
+              </a:rPr>
+              <a:t>/</a:t>
+            </a:r>
+            <a:r>
+              <a:rPr>
+                <a:solidFill>
+                  <a:srgbClr val="003B4F"/>
+                </a:solidFill>
+                <a:latin typeface="Courier"/>
+              </a:rPr>
+              <a:t> n_quad</a:t>
+            </a:r>
+            <a:br/>
+            <a:r>
+              <a:rPr>
+                <a:solidFill>
+                  <a:srgbClr val="003B4F"/>
+                </a:solidFill>
+                <a:latin typeface="Courier"/>
+              </a:rPr>
+              <a:t>var_within &lt;- MS_within</a:t>
+            </a:r>
+            <a:br/>
+            <a:br/>
+            <a:r>
+              <a:rPr>
+                <a:solidFill>
                   <a:srgbClr val="4758AB"/>
                 </a:solidFill>
                 <a:latin typeface="Courier"/>
@@ -9488,29 +11512,186 @@
                 </a:solidFill>
                 <a:latin typeface="Courier"/>
               </a:rPr>
-              <a:t>"Correctly specified nested ANOVA:</a:t>
+              <a:t>"among patches:"</a:t>
             </a:r>
             <a:r>
               <a:rPr>
                 <a:solidFill>
+                  <a:srgbClr val="003B4F"/>
+                </a:solidFill>
+                <a:latin typeface="Courier"/>
+              </a:rPr>
+              <a:t>, </a:t>
+            </a:r>
+            <a:r>
+              <a:rPr>
+                <a:solidFill>
+                  <a:srgbClr val="4758AB"/>
+                </a:solidFill>
+                <a:latin typeface="Courier"/>
+              </a:rPr>
+              <a:t>round</a:t>
+            </a:r>
+            <a:r>
+              <a:rPr>
+                <a:solidFill>
+                  <a:srgbClr val="003B4F"/>
+                </a:solidFill>
+                <a:latin typeface="Courier"/>
+              </a:rPr>
+              <a:t>(var_patch, </a:t>
+            </a:r>
+            <a:r>
+              <a:rPr>
+                <a:solidFill>
+                  <a:srgbClr val="AD0000"/>
+                </a:solidFill>
+                <a:latin typeface="Courier"/>
+              </a:rPr>
+              <a:t>1</a:t>
+            </a:r>
+            <a:r>
+              <a:rPr>
+                <a:solidFill>
+                  <a:srgbClr val="003B4F"/>
+                </a:solidFill>
+                <a:latin typeface="Courier"/>
+              </a:rPr>
+              <a:t>), </a:t>
+            </a:r>
+            <a:r>
+              <a:rPr>
+                <a:solidFill>
+                  <a:srgbClr val="20794D"/>
+                </a:solidFill>
+                <a:latin typeface="Courier"/>
+              </a:rPr>
+              <a:t>"</a:t>
+            </a:r>
+            <a:br/>
+            <a:r>
+              <a:rPr>
+                <a:solidFill>
+                  <a:srgbClr val="20794D"/>
+                </a:solidFill>
+                <a:latin typeface="Courier"/>
+              </a:rPr>
+              <a:t>"</a:t>
+            </a:r>
+            <a:r>
+              <a:rPr>
+                <a:solidFill>
+                  <a:srgbClr val="003B4F"/>
+                </a:solidFill>
+                <a:latin typeface="Courier"/>
+              </a:rPr>
+              <a:t>)</a:t>
+            </a:r>
+            <a:br/>
+            <a:r>
+              <a:rPr i="1">
+                <a:solidFill>
                   <a:srgbClr val="5E5E5E"/>
                 </a:solidFill>
                 <a:latin typeface="Courier"/>
               </a:rPr>
-              <a:t>\n\n</a:t>
-            </a:r>
+              <a:t>## among patches: 294.3</a:t>
+            </a:r>
+            <a:br/>
             <a:r>
               <a:rPr>
                 <a:solidFill>
+                  <a:srgbClr val="4758AB"/>
+                </a:solidFill>
+                <a:latin typeface="Courier"/>
+              </a:rPr>
+              <a:t>cat</a:t>
+            </a:r>
+            <a:r>
+              <a:rPr>
+                <a:solidFill>
+                  <a:srgbClr val="003B4F"/>
+                </a:solidFill>
+                <a:latin typeface="Courier"/>
+              </a:rPr>
+              <a:t>(</a:t>
+            </a:r>
+            <a:r>
+              <a:rPr>
+                <a:solidFill>
                   <a:srgbClr val="20794D"/>
                 </a:solidFill>
                 <a:latin typeface="Courier"/>
               </a:rPr>
+              <a:t>"within patch: "</a:t>
+            </a:r>
+            <a:r>
+              <a:rPr>
+                <a:solidFill>
+                  <a:srgbClr val="003B4F"/>
+                </a:solidFill>
+                <a:latin typeface="Courier"/>
+              </a:rPr>
+              <a:t>, </a:t>
+            </a:r>
+            <a:r>
+              <a:rPr>
+                <a:solidFill>
+                  <a:srgbClr val="4758AB"/>
+                </a:solidFill>
+                <a:latin typeface="Courier"/>
+              </a:rPr>
+              <a:t>round</a:t>
+            </a:r>
+            <a:r>
+              <a:rPr>
+                <a:solidFill>
+                  <a:srgbClr val="003B4F"/>
+                </a:solidFill>
+                <a:latin typeface="Courier"/>
+              </a:rPr>
+              <a:t>(var_within, </a:t>
+            </a:r>
+            <a:r>
+              <a:rPr>
+                <a:solidFill>
+                  <a:srgbClr val="AD0000"/>
+                </a:solidFill>
+                <a:latin typeface="Courier"/>
+              </a:rPr>
+              <a:t>1</a:t>
+            </a:r>
+            <a:r>
+              <a:rPr>
+                <a:solidFill>
+                  <a:srgbClr val="003B4F"/>
+                </a:solidFill>
+                <a:latin typeface="Courier"/>
+              </a:rPr>
+              <a:t>), </a:t>
+            </a:r>
+            <a:r>
+              <a:rPr>
+                <a:solidFill>
+                  <a:srgbClr val="20794D"/>
+                </a:solidFill>
+                <a:latin typeface="Courier"/>
+              </a:rPr>
               <a:t>"</a:t>
             </a:r>
+            <a:br/>
             <a:r>
               <a:rPr>
                 <a:solidFill>
+                  <a:srgbClr val="20794D"/>
+                </a:solidFill>
+                <a:latin typeface="Courier"/>
+              </a:rPr>
+              <a:t>"</a:t>
+            </a:r>
+            <a:r>
+              <a:rPr>
+                <a:solidFill>
                   <a:srgbClr val="003B4F"/>
                 </a:solidFill>
                 <a:latin typeface="Courier"/>
@@ -9525,7 +11706,7 @@
                 </a:solidFill>
                 <a:latin typeface="Courier"/>
               </a:rPr>
-              <a:t>## Correctly specified nested ANOVA:</a:t>
+              <a:t>## within patch:  298.6</a:t>
             </a:r>
             <a:br/>
             <a:r>
@@ -9535,7 +11716,7 @@
                 </a:solidFill>
                 <a:latin typeface="Courier"/>
               </a:rPr>
-              <a:t>summary</a:t>
+              <a:t>cat</a:t>
             </a:r>
             <a:r>
               <a:rPr>
@@ -9544,117 +11725,711 @@
                 </a:solidFill>
                 <a:latin typeface="Courier"/>
               </a:rPr>
-              <a:t>(u_nested_model)</a:t>
+              <a:t>(</a:t>
+            </a:r>
+            <a:r>
+              <a:rPr>
+                <a:solidFill>
+                  <a:srgbClr val="20794D"/>
+                </a:solidFill>
+                <a:latin typeface="Courier"/>
+              </a:rPr>
+              <a:t>"% among patches:"</a:t>
+            </a:r>
+            <a:r>
+              <a:rPr>
+                <a:solidFill>
+                  <a:srgbClr val="003B4F"/>
+                </a:solidFill>
+                <a:latin typeface="Courier"/>
+              </a:rPr>
+              <a:t>,</a:t>
             </a:r>
             <a:br/>
             <a:r>
+              <a:rPr>
+                <a:solidFill>
+                  <a:srgbClr val="003B4F"/>
+                </a:solidFill>
+                <a:latin typeface="Courier"/>
+              </a:rPr>
+              <a:t>    </a:t>
+            </a:r>
+            <a:r>
+              <a:rPr>
+                <a:solidFill>
+                  <a:srgbClr val="4758AB"/>
+                </a:solidFill>
+                <a:latin typeface="Courier"/>
+              </a:rPr>
+              <a:t>round</a:t>
+            </a:r>
+            <a:r>
+              <a:rPr>
+                <a:solidFill>
+                  <a:srgbClr val="003B4F"/>
+                </a:solidFill>
+                <a:latin typeface="Courier"/>
+              </a:rPr>
+              <a:t>(</a:t>
+            </a:r>
+            <a:r>
+              <a:rPr>
+                <a:solidFill>
+                  <a:srgbClr val="AD0000"/>
+                </a:solidFill>
+                <a:latin typeface="Courier"/>
+              </a:rPr>
+              <a:t>100</a:t>
+            </a:r>
+            <a:r>
+              <a:rPr>
+                <a:solidFill>
+                  <a:srgbClr val="003B4F"/>
+                </a:solidFill>
+                <a:latin typeface="Courier"/>
+              </a:rPr>
+              <a:t> </a:t>
+            </a:r>
+            <a:r>
+              <a:rPr>
+                <a:solidFill>
+                  <a:srgbClr val="5E5E5E"/>
+                </a:solidFill>
+                <a:latin typeface="Courier"/>
+              </a:rPr>
+              <a:t>*</a:t>
+            </a:r>
+            <a:r>
+              <a:rPr>
+                <a:solidFill>
+                  <a:srgbClr val="003B4F"/>
+                </a:solidFill>
+                <a:latin typeface="Courier"/>
+              </a:rPr>
+              <a:t> var_patch </a:t>
+            </a:r>
+            <a:r>
+              <a:rPr>
+                <a:solidFill>
+                  <a:srgbClr val="5E5E5E"/>
+                </a:solidFill>
+                <a:latin typeface="Courier"/>
+              </a:rPr>
+              <a:t>/</a:t>
+            </a:r>
+            <a:br/>
+            <a:r>
+              <a:rPr>
+                <a:solidFill>
+                  <a:srgbClr val="003B4F"/>
+                </a:solidFill>
+                <a:latin typeface="Courier"/>
+              </a:rPr>
+              <a:t>          (var_patch </a:t>
+            </a:r>
+            <a:r>
+              <a:rPr>
+                <a:solidFill>
+                  <a:srgbClr val="5E5E5E"/>
+                </a:solidFill>
+                <a:latin typeface="Courier"/>
+              </a:rPr>
+              <a:t>+</a:t>
+            </a:r>
+            <a:r>
+              <a:rPr>
+                <a:solidFill>
+                  <a:srgbClr val="003B4F"/>
+                </a:solidFill>
+                <a:latin typeface="Courier"/>
+              </a:rPr>
+              <a:t> var_within), </a:t>
+            </a:r>
+            <a:r>
+              <a:rPr>
+                <a:solidFill>
+                  <a:srgbClr val="AD0000"/>
+                </a:solidFill>
+                <a:latin typeface="Courier"/>
+              </a:rPr>
+              <a:t>1</a:t>
+            </a:r>
+            <a:r>
+              <a:rPr>
+                <a:solidFill>
+                  <a:srgbClr val="003B4F"/>
+                </a:solidFill>
+                <a:latin typeface="Courier"/>
+              </a:rPr>
+              <a:t>), </a:t>
+            </a:r>
+            <a:r>
+              <a:rPr>
+                <a:solidFill>
+                  <a:srgbClr val="20794D"/>
+                </a:solidFill>
+                <a:latin typeface="Courier"/>
+              </a:rPr>
+              <a:t>"%</a:t>
+            </a:r>
+            <a:br/>
+            <a:r>
+              <a:rPr>
+                <a:solidFill>
+                  <a:srgbClr val="20794D"/>
+                </a:solidFill>
+                <a:latin typeface="Courier"/>
+              </a:rPr>
+              <a:t>"</a:t>
+            </a:r>
+            <a:r>
+              <a:rPr>
+                <a:solidFill>
+                  <a:srgbClr val="003B4F"/>
+                </a:solidFill>
+                <a:latin typeface="Courier"/>
+              </a:rPr>
+              <a:t>)</a:t>
+            </a:r>
+            <a:br/>
+            <a:r>
               <a:rPr i="1">
                 <a:solidFill>
                   <a:srgbClr val="5E5E5E"/>
                 </a:solidFill>
                 <a:latin typeface="Courier"/>
               </a:rPr>
-              <a:t>## </a:t>
-            </a:r>
-            <a:br/>
-            <a:r>
-              <a:rPr i="1">
-                <a:solidFill>
-                  <a:srgbClr val="5E5E5E"/>
-                </a:solidFill>
-                <a:latin typeface="Courier"/>
-              </a:rPr>
-              <a:t>## Error: treat:patch</a:t>
-            </a:r>
-            <a:br/>
-            <a:r>
-              <a:rPr i="1">
-                <a:solidFill>
-                  <a:srgbClr val="5E5E5E"/>
-                </a:solidFill>
-                <a:latin typeface="Courier"/>
-              </a:rPr>
-              <a:t>##           Df Sum Sq Mean Sq F value Pr(&gt;F)  </a:t>
-            </a:r>
-            <a:br/>
-            <a:r>
-              <a:rPr i="1">
-                <a:solidFill>
-                  <a:srgbClr val="5E5E5E"/>
-                </a:solidFill>
-                <a:latin typeface="Courier"/>
-              </a:rPr>
-              <a:t>## treat      3  14429    4810   2.717 0.0913 .</a:t>
-            </a:r>
-            <a:br/>
-            <a:r>
-              <a:rPr i="1">
-                <a:solidFill>
-                  <a:srgbClr val="5E5E5E"/>
-                </a:solidFill>
-                <a:latin typeface="Courier"/>
-              </a:rPr>
-              <a:t>## Residuals 12  21242    1770                 </a:t>
-            </a:r>
-            <a:br/>
-            <a:r>
-              <a:rPr i="1">
-                <a:solidFill>
-                  <a:srgbClr val="5E5E5E"/>
-                </a:solidFill>
-                <a:latin typeface="Courier"/>
-              </a:rPr>
-              <a:t>## ---</a:t>
-            </a:r>
-            <a:br/>
-            <a:r>
-              <a:rPr i="1">
-                <a:solidFill>
-                  <a:srgbClr val="5E5E5E"/>
-                </a:solidFill>
-                <a:latin typeface="Courier"/>
-              </a:rPr>
-              <a:t>## Signif. codes:  0 '***' 0.001 '**' 0.01 '*' 0.05 '.' 0.1 ' ' 1</a:t>
-            </a:r>
-            <a:br/>
-            <a:r>
-              <a:rPr i="1">
-                <a:solidFill>
-                  <a:srgbClr val="5E5E5E"/>
-                </a:solidFill>
-                <a:latin typeface="Courier"/>
-              </a:rPr>
-              <a:t>## </a:t>
-            </a:r>
-            <a:br/>
-            <a:r>
-              <a:rPr i="1">
-                <a:solidFill>
-                  <a:srgbClr val="5E5E5E"/>
-                </a:solidFill>
-                <a:latin typeface="Courier"/>
-              </a:rPr>
-              <a:t>## Error: Within</a:t>
-            </a:r>
-            <a:br/>
-            <a:r>
-              <a:rPr i="1">
-                <a:solidFill>
-                  <a:srgbClr val="5E5E5E"/>
-                </a:solidFill>
-                <a:latin typeface="Courier"/>
-              </a:rPr>
-              <a:t>##           Df Sum Sq Mean Sq F value Pr(&gt;F)</a:t>
-            </a:r>
-            <a:br/>
-            <a:r>
-              <a:rPr i="1">
-                <a:solidFill>
-                  <a:srgbClr val="5E5E5E"/>
-                </a:solidFill>
-                <a:latin typeface="Courier"/>
-              </a:rPr>
-              <a:t>## Residuals 64  19110   298.6</a:t>
+              <a:t>## % among patches: 49.6 %</a:t>
+            </a:r>
+          </a:p>
+          <a:p>
+            <a:pPr lvl="0" indent="0" marL="1270000">
+              <a:buNone/>
+            </a:pPr>
+            <a:r>
+              <a:rPr sz="2000" b="1"/>
+              <a:t>Tip</a:t>
+            </a:r>
+          </a:p>
+          <a:p>
+            <a:pPr lvl="0" indent="0" marL="1270000">
+              <a:buNone/>
+            </a:pPr>
+            <a:r>
+              <a:rPr sz="2000" b="1"/>
+              <a:t>🖐 Half the variance is </a:t>
+            </a:r>
+            <a:r>
+              <a:rPr sz="2000" b="1" i="1"/>
+              <a:t>between patches</a:t>
+            </a:r>
+          </a:p>
+          <a:p>
+            <a:pPr lvl="0" indent="0" marL="1270000">
+              <a:buNone/>
+            </a:pPr>
+            <a:r>
+              <a:rPr sz="2000"/>
+              <a:t>Ignore that and you are pretending 80 quadrats are 80 independent observations. They are closer to 16.</a:t>
+            </a:r>
+          </a:p>
+        </p:txBody>
+      </p:sp>
+    </p:spTree>
+  </p:cSld>
+</p:sld>
+</file>
+
+<file path=ppt/slides/slide45.xml><?xml version="1.0" encoding="utf-8"?>
+<p:sld xmlns:a="http://schemas.openxmlformats.org/drawingml/2006/main" xmlns:r="http://schemas.openxmlformats.org/officeDocument/2006/relationships" xmlns:p="http://schemas.openxmlformats.org/presentationml/2006/main">
+  <p:cSld>
+    <p:spTree>
+      <p:nvGrpSpPr>
+        <p:cNvPr id="1" name=""/>
+        <p:cNvGrpSpPr/>
+        <p:nvPr/>
+      </p:nvGrpSpPr>
+      <p:grpSpPr>
+        <a:xfrm>
+          <a:off x="0" y="0"/>
+          <a:ext cx="0" cy="0"/>
+          <a:chOff x="0" y="0"/>
+          <a:chExt cx="0" cy="0"/>
+        </a:xfrm>
+      </p:grpSpPr>
+      <p:sp>
+        <p:nvSpPr>
+          <p:cNvPr id="2" name="Title 1"/>
+          <p:cNvSpPr>
+            <a:spLocks noGrp="1"/>
+          </p:cNvSpPr>
+          <p:nvPr>
+            <p:ph type="title"/>
+          </p:nvPr>
+        </p:nvSpPr>
+        <p:spPr>
+          <a:xfrm>
+            <a:off x="0" y="0"/>
+            <a:ext cx="9144000" cy="602780"/>
+          </a:xfrm>
+          <a:solidFill>
+            <a:srgbClr val="70121D"/>
+          </a:solidFill>
+        </p:spPr>
+        <p:txBody>
+          <a:bodyPr/>
+          <a:lstStyle/>
+          <a:p>
+            <a:pPr lvl="0" indent="0" marL="0">
+              <a:buNone/>
+            </a:pPr>
+            <a:r>
+              <a:rPr/>
+              <a:t>Wrap-up</a:t>
+            </a:r>
+          </a:p>
+        </p:txBody>
+      </p:sp>
+      <p:sp>
+        <p:nvSpPr>
+          <p:cNvPr id="3" name="Content Placeholder 2"/>
+          <p:cNvSpPr>
+            <a:spLocks noGrp="1"/>
+          </p:cNvSpPr>
+          <p:nvPr>
+            <p:ph idx="1" sz="half"/>
+          </p:nvPr>
+        </p:nvSpPr>
+        <p:spPr/>
+        <p:txBody>
+          <a:bodyPr/>
+          <a:lstStyle/>
+          <a:p>
+            <a:pPr lvl="0" indent="0" marL="0">
+              <a:buNone/>
+            </a:pPr>
+            <a:r>
+              <a:rPr/>
+              <a:t>Today you:</a:t>
+            </a:r>
+          </a:p>
+          <a:p>
+            <a:pPr lvl="0"/>
+            <a:r>
+              <a:rPr/>
+              <a:t>Told a </a:t>
+            </a:r>
+            <a:r>
+              <a:rPr b="1"/>
+              <a:t>nested</a:t>
+            </a:r>
+            <a:r>
+              <a:rPr/>
+              <a:t> design from a </a:t>
+            </a:r>
+            <a:r>
+              <a:rPr b="1"/>
+              <a:t>crossed</a:t>
+            </a:r>
+            <a:r>
+              <a:rPr/>
+              <a:t> one, and learned the three questions that decide it</a:t>
+            </a:r>
+          </a:p>
+          <a:p>
+            <a:pPr lvl="0"/>
+            <a:r>
+              <a:rPr/>
+              <a:t>Found the right </a:t>
+            </a:r>
+            <a:r>
+              <a:rPr b="1"/>
+              <a:t>error term</a:t>
+            </a:r>
+            <a:r>
+              <a:rPr/>
+              <a:t> by asking what the treatment was applied to</a:t>
+            </a:r>
+          </a:p>
+          <a:p>
+            <a:pPr lvl="0"/>
+            <a:r>
+              <a:rPr/>
+              <a:t>Watched the same data give </a:t>
+            </a:r>
+            <a:r>
+              <a:rPr b="1"/>
+              <a:t>F = 16.11 (p &lt; 0.0000001)</a:t>
+            </a:r>
+            <a:r>
+              <a:rPr/>
+              <a:t> the wrong way and </a:t>
+            </a:r>
+            <a:r>
+              <a:rPr b="1"/>
+              <a:t>F = 2.72 (p = 0.091)</a:t>
+            </a:r>
+            <a:r>
+              <a:rPr/>
+              <a:t> the right way</a:t>
+            </a:r>
+          </a:p>
+          <a:p>
+            <a:pPr lvl="0"/>
+            <a:r>
+              <a:rPr/>
+              <a:t>Estimated </a:t>
+            </a:r>
+            <a:r>
+              <a:rPr b="1"/>
+              <a:t>variance components</a:t>
+            </a:r>
+            <a:r>
+              <a:rPr/>
+              <a:t>, and found that half the variation lives between patches</a:t>
+            </a:r>
+          </a:p>
+          <a:p>
+            <a:pPr lvl="0"/>
+            <a:r>
+              <a:rPr/>
+              <a:t>Wrote it up with the correct degrees of freedom</a:t>
+            </a:r>
+          </a:p>
+          <a:p>
+            <a:pPr lvl="0" indent="0" marL="1270000">
+              <a:buNone/>
+            </a:pPr>
+            <a:r>
+              <a:rPr sz="2000" b="1"/>
+              <a:t>Important</a:t>
+            </a:r>
+          </a:p>
+          <a:p>
+            <a:pPr lvl="0" indent="0" marL="1270000">
+              <a:buNone/>
+            </a:pPr>
+            <a:r>
+              <a:rPr sz="2000" b="1"/>
+              <a:t>⚠️ The mistake this lecture exists to prevent</a:t>
+            </a:r>
+          </a:p>
+          <a:p>
+            <a:pPr lvl="0" indent="0" marL="1270000">
+              <a:buNone/>
+            </a:pPr>
+            <a:r>
+              <a:rPr sz="2000"/>
+              <a:t>Using the residual mean square as your denominator when the treatment was applied to something coarser than a single measurement. It inflates F, shrinks p, and it is the most common error in ecological field experiments (Hurlbert 1984).</a:t>
+            </a:r>
+          </a:p>
+        </p:txBody>
+      </p:sp>
+      <p:sp>
+        <p:nvSpPr>
+          <p:cNvPr id="4" name="Content Placeholder 3"/>
+          <p:cNvSpPr>
+            <a:spLocks noGrp="1"/>
+          </p:cNvSpPr>
+          <p:nvPr>
+            <p:ph idx="2" sz="half"/>
+          </p:nvPr>
+        </p:nvSpPr>
+        <p:spPr/>
+        <p:txBody>
+          <a:bodyPr/>
+          <a:lstStyle/>
+          <a:p>
+            <a:pPr lvl="0" indent="0" marL="1270000">
+              <a:buNone/>
+            </a:pPr>
+            <a:r>
+              <a:rPr sz="2000" b="1"/>
+              <a:t>Note</a:t>
+            </a:r>
+          </a:p>
+          <a:p>
+            <a:pPr lvl="0" indent="0" marL="1270000">
+              <a:buNone/>
+            </a:pPr>
+            <a:r>
+              <a:rPr sz="2000" b="1"/>
+              <a:t>✅ This has been the plan all along</a:t>
+            </a:r>
+          </a:p>
+          <a:p>
+            <a:pPr lvl="0" indent="0" marL="1270000">
+              <a:buNone/>
+            </a:pPr>
+            <a:r>
+              <a:rPr sz="2000"/>
+              <a:t>Today it finally got its own name and its own model. </a:t>
+            </a:r>
+            <a:r>
+              <a:rPr sz="2000" b="1"/>
+              <a:t>Sums of squares were never the problem — the denominator was.</a:t>
+            </a:r>
+          </a:p>
+          <a:p>
+            <a:pPr lvl="0" indent="0" marL="1270000">
+              <a:buNone/>
+            </a:pPr>
+            <a:r>
+              <a:rPr sz="2000" b="1"/>
+              <a:t>Tip</a:t>
+            </a:r>
+          </a:p>
+          <a:p>
+            <a:pPr lvl="0" indent="0" marL="1270000">
+              <a:buNone/>
+            </a:pPr>
+            <a:r>
+              <a:rPr sz="2000" b="1"/>
+              <a:t>🖐 Before next class</a:t>
+            </a:r>
+          </a:p>
+          <a:p>
+            <a:pPr lvl="0" indent="0" marL="1270000">
+              <a:buNone/>
+            </a:pPr>
+            <a:r>
+              <a:rPr sz="2000"/>
+              <a:t>Take a dataset you actually care about — yours, or one from a paper — and answer the three questions on the first slide of this section. Write down what your true </a:t>
+            </a:r>
+            <a:r>
+              <a:rPr sz="2000" i="1"/>
+              <a:t>n</a:t>
+            </a:r>
+            <a:r>
+              <a:rPr sz="2000"/>
+              <a:t> is. If it is smaller than the number of rows, you have found a nested design.</a:t>
+            </a:r>
+          </a:p>
+        </p:txBody>
+      </p:sp>
+    </p:spTree>
+  </p:cSld>
+</p:sld>
+</file>
+
+<file path=ppt/slides/slide46.xml><?xml version="1.0" encoding="utf-8"?>
+<p:sld xmlns:a="http://schemas.openxmlformats.org/drawingml/2006/main" xmlns:r="http://schemas.openxmlformats.org/officeDocument/2006/relationships" xmlns:p="http://schemas.openxmlformats.org/presentationml/2006/main">
+  <p:cSld>
+    <p:spTree>
+      <p:nvGrpSpPr>
+        <p:cNvPr id="1" name=""/>
+        <p:cNvGrpSpPr/>
+        <p:nvPr/>
+      </p:nvGrpSpPr>
+      <p:grpSpPr>
+        <a:xfrm>
+          <a:off x="0" y="0"/>
+          <a:ext cx="0" cy="0"/>
+          <a:chOff x="0" y="0"/>
+          <a:chExt cx="0" cy="0"/>
+        </a:xfrm>
+      </p:grpSpPr>
+      <p:sp>
+        <p:nvSpPr>
+          <p:cNvPr id="2" name="Title 1"/>
+          <p:cNvSpPr>
+            <a:spLocks noGrp="1"/>
+          </p:cNvSpPr>
+          <p:nvPr>
+            <p:ph type="title"/>
+          </p:nvPr>
+        </p:nvSpPr>
+        <p:spPr>
+          <a:xfrm>
+            <a:off x="0" y="0"/>
+            <a:ext cx="9144000" cy="582780"/>
+          </a:xfrm>
+        </p:spPr>
+        <p:txBody>
+          <a:bodyPr/>
+          <a:lstStyle/>
+          <a:p>
+            <a:pPr lvl="0" indent="0" marL="0">
+              <a:buNone/>
+            </a:pPr>
+            <a:r>
+              <a:rPr/>
+              <a:t>Getting unstuck</a:t>
+            </a:r>
+          </a:p>
+        </p:txBody>
+      </p:sp>
+      <p:sp>
+        <p:nvSpPr>
+          <p:cNvPr id="3" name="Content Placeholder 2"/>
+          <p:cNvSpPr>
+            <a:spLocks noGrp="1"/>
+          </p:cNvSpPr>
+          <p:nvPr>
+            <p:ph idx="1"/>
+          </p:nvPr>
+        </p:nvSpPr>
+        <p:spPr/>
+        <p:txBody>
+          <a:bodyPr/>
+          <a:lstStyle/>
+          <a:p>
+            <a:pPr lvl="0" indent="0" marL="0">
+              <a:buNone/>
+            </a:pPr>
+            <a:r>
+              <a:rPr/>
+              <a:t>When code breaks — and it will, that is normal:</a:t>
+            </a:r>
+          </a:p>
+          <a:p>
+            <a:pPr lvl="0" indent="-342900" marL="342900">
+              <a:buAutoNum type="arabicPeriod"/>
+            </a:pPr>
+            <a:r>
+              <a:rPr/>
+              <a:t>Read the </a:t>
+            </a:r>
+            <a:r>
+              <a:rPr b="1"/>
+              <a:t>error message</a:t>
+            </a:r>
+            <a:r>
+              <a:rPr/>
+              <a:t> out loud; it usually names the line</a:t>
+            </a:r>
+          </a:p>
+          <a:p>
+            <a:pPr lvl="0" indent="-342900" marL="342900">
+              <a:buAutoNum type="arabicPeriod"/>
+            </a:pPr>
+            <a:r>
+              <a:rPr/>
+              <a:t>Check the usual suspects: are </a:t>
+            </a:r>
+            <a:r>
+              <a:rPr>
+                <a:latin typeface="Courier"/>
+              </a:rPr>
+              <a:t>patch</a:t>
+            </a:r>
+            <a:r>
+              <a:rPr/>
+              <a:t> and </a:t>
+            </a:r>
+            <a:r>
+              <a:rPr>
+                <a:latin typeface="Courier"/>
+              </a:rPr>
+              <a:t>treat</a:t>
+            </a:r>
+            <a:r>
+              <a:rPr/>
+              <a:t> </a:t>
+            </a:r>
+            <a:r>
+              <a:rPr b="1"/>
+              <a:t>factors</a:t>
+            </a:r>
+            <a:r>
+              <a:rPr/>
+              <a:t>? Are your nested unit IDs </a:t>
+            </a:r>
+            <a:r>
+              <a:rPr i="1"/>
+              <a:t>unique</a:t>
+            </a:r>
+            <a:r>
+              <a:rPr/>
+              <a:t> across the whole dataset (patch 1–16), or do they restart within each treatment (1–4, 1–4, …)? If they restart, R cannot tell nesting from crossing — renumber them, or write </a:t>
+            </a:r>
+            <a:r>
+              <a:rPr>
+                <a:latin typeface="Courier"/>
+              </a:rPr>
+              <a:t>Error(treat:patch)</a:t>
+            </a:r>
+          </a:p>
+          <a:p>
+            <a:pPr lvl="0" indent="-342900" marL="342900">
+              <a:buAutoNum type="arabicPeriod"/>
+            </a:pPr>
+            <a:r>
+              <a:rPr/>
+              <a:t>Seeing </a:t>
+            </a:r>
+            <a:r>
+              <a:rPr b="1"/>
+              <a:t>“Error() model is singular”</a:t>
+            </a:r>
+            <a:r>
+              <a:rPr/>
+              <a:t>? You asked for more error-term combinations than your design contains — usually </a:t>
+            </a:r>
+            <a:r>
+              <a:rPr>
+                <a:latin typeface="Courier"/>
+              </a:rPr>
+              <a:t>Error(a:b)</a:t>
+            </a:r>
+            <a:r>
+              <a:rPr/>
+              <a:t> where </a:t>
+            </a:r>
+            <a:r>
+              <a:rPr>
+                <a:latin typeface="Courier"/>
+              </a:rPr>
+              <a:t>Error(b)</a:t>
+            </a:r>
+            <a:r>
+              <a:rPr/>
+              <a:t> is enough</a:t>
+            </a:r>
+          </a:p>
+          <a:p>
+            <a:pPr lvl="0" indent="-342900" marL="342900">
+              <a:buAutoNum type="arabicPeriod"/>
+            </a:pPr>
+            <a:r>
+              <a:rPr/>
+              <a:t>Bring the </a:t>
+            </a:r>
+            <a:r>
+              <a:rPr b="1"/>
+              <a:t>exact error</a:t>
+            </a:r>
+            <a:r>
+              <a:rPr/>
+              <a:t> (copy-paste it) to class or office hours</a:t>
+            </a:r>
+          </a:p>
+          <a:p>
+            <a:pPr lvl="0" indent="0" marL="1270000">
+              <a:buNone/>
+            </a:pPr>
+            <a:r>
+              <a:rPr sz="2000" b="1"/>
+              <a:t>Note</a:t>
+            </a:r>
+          </a:p>
+          <a:p>
+            <a:pPr lvl="0" indent="0" marL="1270000">
+              <a:buNone/>
+            </a:pPr>
+            <a:r>
+              <a:rPr sz="2000" b="1"/>
+              <a:t>✅ Key idea</a:t>
+            </a:r>
+          </a:p>
+          <a:p>
+            <a:pPr lvl="0" indent="0" marL="1270000">
+              <a:buNone/>
+            </a:pPr>
+            <a:r>
+              <a:rPr sz="2000"/>
+              <a:t>Every working scientist googles error messages daily. Getting stuck is not failing — it is the job.</a:t>
             </a:r>
           </a:p>
         </p:txBody>

--- a/docs/content/nested_anova/nested_anova_lecture.pptx
+++ b/docs/content/nested_anova/nested_anova_lecture.pptx
@@ -50,7 +50,6 @@
     <p:sldId id="298" r:id="rId44"/>
     <p:sldId id="299" r:id="rId45"/>
     <p:sldId id="300" r:id="rId46"/>
-    <p:sldId id="301" r:id="rId47"/>
   </p:sldIdLst>
   <p:sldSz cx="9144000" cy="5143500" type="screen16x9"/>
   <p:notesSz cx="6858000" cy="9144000"/>
@@ -12204,232 +12203,6 @@
             <a:r>
               <a:rPr sz="2000"/>
               <a:t> is. If it is smaller than the number of rows, you have found a nested design.</a:t>
-            </a:r>
-          </a:p>
-        </p:txBody>
-      </p:sp>
-    </p:spTree>
-  </p:cSld>
-</p:sld>
-</file>
-
-<file path=ppt/slides/slide46.xml><?xml version="1.0" encoding="utf-8"?>
-<p:sld xmlns:a="http://schemas.openxmlformats.org/drawingml/2006/main" xmlns:r="http://schemas.openxmlformats.org/officeDocument/2006/relationships" xmlns:p="http://schemas.openxmlformats.org/presentationml/2006/main">
-  <p:cSld>
-    <p:spTree>
-      <p:nvGrpSpPr>
-        <p:cNvPr id="1" name=""/>
-        <p:cNvGrpSpPr/>
-        <p:nvPr/>
-      </p:nvGrpSpPr>
-      <p:grpSpPr>
-        <a:xfrm>
-          <a:off x="0" y="0"/>
-          <a:ext cx="0" cy="0"/>
-          <a:chOff x="0" y="0"/>
-          <a:chExt cx="0" cy="0"/>
-        </a:xfrm>
-      </p:grpSpPr>
-      <p:sp>
-        <p:nvSpPr>
-          <p:cNvPr id="2" name="Title 1"/>
-          <p:cNvSpPr>
-            <a:spLocks noGrp="1"/>
-          </p:cNvSpPr>
-          <p:nvPr>
-            <p:ph type="title"/>
-          </p:nvPr>
-        </p:nvSpPr>
-        <p:spPr>
-          <a:xfrm>
-            <a:off x="0" y="0"/>
-            <a:ext cx="9144000" cy="582780"/>
-          </a:xfrm>
-        </p:spPr>
-        <p:txBody>
-          <a:bodyPr/>
-          <a:lstStyle/>
-          <a:p>
-            <a:pPr lvl="0" indent="0" marL="0">
-              <a:buNone/>
-            </a:pPr>
-            <a:r>
-              <a:rPr/>
-              <a:t>Getting unstuck</a:t>
-            </a:r>
-          </a:p>
-        </p:txBody>
-      </p:sp>
-      <p:sp>
-        <p:nvSpPr>
-          <p:cNvPr id="3" name="Content Placeholder 2"/>
-          <p:cNvSpPr>
-            <a:spLocks noGrp="1"/>
-          </p:cNvSpPr>
-          <p:nvPr>
-            <p:ph idx="1"/>
-          </p:nvPr>
-        </p:nvSpPr>
-        <p:spPr/>
-        <p:txBody>
-          <a:bodyPr/>
-          <a:lstStyle/>
-          <a:p>
-            <a:pPr lvl="0" indent="0" marL="0">
-              <a:buNone/>
-            </a:pPr>
-            <a:r>
-              <a:rPr/>
-              <a:t>When code breaks — and it will, that is normal:</a:t>
-            </a:r>
-          </a:p>
-          <a:p>
-            <a:pPr lvl="0" indent="-342900" marL="342900">
-              <a:buAutoNum type="arabicPeriod"/>
-            </a:pPr>
-            <a:r>
-              <a:rPr/>
-              <a:t>Read the </a:t>
-            </a:r>
-            <a:r>
-              <a:rPr b="1"/>
-              <a:t>error message</a:t>
-            </a:r>
-            <a:r>
-              <a:rPr/>
-              <a:t> out loud; it usually names the line</a:t>
-            </a:r>
-          </a:p>
-          <a:p>
-            <a:pPr lvl="0" indent="-342900" marL="342900">
-              <a:buAutoNum type="arabicPeriod"/>
-            </a:pPr>
-            <a:r>
-              <a:rPr/>
-              <a:t>Check the usual suspects: are </a:t>
-            </a:r>
-            <a:r>
-              <a:rPr>
-                <a:latin typeface="Courier"/>
-              </a:rPr>
-              <a:t>patch</a:t>
-            </a:r>
-            <a:r>
-              <a:rPr/>
-              <a:t> and </a:t>
-            </a:r>
-            <a:r>
-              <a:rPr>
-                <a:latin typeface="Courier"/>
-              </a:rPr>
-              <a:t>treat</a:t>
-            </a:r>
-            <a:r>
-              <a:rPr/>
-              <a:t> </a:t>
-            </a:r>
-            <a:r>
-              <a:rPr b="1"/>
-              <a:t>factors</a:t>
-            </a:r>
-            <a:r>
-              <a:rPr/>
-              <a:t>? Are your nested unit IDs </a:t>
-            </a:r>
-            <a:r>
-              <a:rPr i="1"/>
-              <a:t>unique</a:t>
-            </a:r>
-            <a:r>
-              <a:rPr/>
-              <a:t> across the whole dataset (patch 1–16), or do they restart within each treatment (1–4, 1–4, …)? If they restart, R cannot tell nesting from crossing — renumber them, or write </a:t>
-            </a:r>
-            <a:r>
-              <a:rPr>
-                <a:latin typeface="Courier"/>
-              </a:rPr>
-              <a:t>Error(treat:patch)</a:t>
-            </a:r>
-          </a:p>
-          <a:p>
-            <a:pPr lvl="0" indent="-342900" marL="342900">
-              <a:buAutoNum type="arabicPeriod"/>
-            </a:pPr>
-            <a:r>
-              <a:rPr/>
-              <a:t>Seeing </a:t>
-            </a:r>
-            <a:r>
-              <a:rPr b="1"/>
-              <a:t>“Error() model is singular”</a:t>
-            </a:r>
-            <a:r>
-              <a:rPr/>
-              <a:t>? You asked for more error-term combinations than your design contains — usually </a:t>
-            </a:r>
-            <a:r>
-              <a:rPr>
-                <a:latin typeface="Courier"/>
-              </a:rPr>
-              <a:t>Error(a:b)</a:t>
-            </a:r>
-            <a:r>
-              <a:rPr/>
-              <a:t> where </a:t>
-            </a:r>
-            <a:r>
-              <a:rPr>
-                <a:latin typeface="Courier"/>
-              </a:rPr>
-              <a:t>Error(b)</a:t>
-            </a:r>
-            <a:r>
-              <a:rPr/>
-              <a:t> is enough</a:t>
-            </a:r>
-          </a:p>
-          <a:p>
-            <a:pPr lvl="0" indent="-342900" marL="342900">
-              <a:buAutoNum type="arabicPeriod"/>
-            </a:pPr>
-            <a:r>
-              <a:rPr/>
-              <a:t>Bring the </a:t>
-            </a:r>
-            <a:r>
-              <a:rPr b="1"/>
-              <a:t>exact error</a:t>
-            </a:r>
-            <a:r>
-              <a:rPr/>
-              <a:t> (copy-paste it) to class or office hours</a:t>
-            </a:r>
-          </a:p>
-          <a:p>
-            <a:pPr lvl="0" indent="0" marL="1270000">
-              <a:buNone/>
-            </a:pPr>
-            <a:r>
-              <a:rPr sz="2000" b="1"/>
-              <a:t>Note</a:t>
-            </a:r>
-          </a:p>
-          <a:p>
-            <a:pPr lvl="0" indent="0" marL="1270000">
-              <a:buNone/>
-            </a:pPr>
-            <a:r>
-              <a:rPr sz="2000" b="1"/>
-              <a:t>✅ Key idea</a:t>
-            </a:r>
-          </a:p>
-          <a:p>
-            <a:pPr lvl="0" indent="0" marL="1270000">
-              <a:buNone/>
-            </a:pPr>
-            <a:r>
-              <a:rPr sz="2000"/>
-              <a:t>Every working scientist googles error messages daily. Getting stuck is not failing — it is the job.</a:t>
             </a:r>
           </a:p>
         </p:txBody>
